--- a/docs/publications/deck/Prama-Evidence-First-Data-Quality.pptx
+++ b/docs/publications/deck/Prama-Evidence-First-Data-Quality.pptx
@@ -7606,20 +7606,112 @@
       </p:sp>
       <p:sp>
         <p:nvSpPr>
-          <p:cNvPr id="3" name="Oval 2"/>
+          <p:cNvPr id="3" name="TextBox 2"/>
+          <p:cNvSpPr txBox="1"/>
+          <p:nvPr/>
+        </p:nvSpPr>
+        <p:spPr>
+          <a:xfrm>
+            <a:off x="5244870" y="137160"/>
+            <a:ext cx="6169584" cy="2514600"/>
+          </a:xfrm>
+          <a:prstGeom prst="rect">
+            <a:avLst/>
+          </a:prstGeom>
+          <a:noFill/>
+        </p:spPr>
+        <p:txBody>
+          <a:bodyPr wrap="square" lIns="0" rIns="0" tIns="0" bIns="0" anchor="t">
+            <a:spAutoFit/>
+          </a:bodyPr>
+          <a:lstStyle/>
+          <a:p>
+            <a:pPr algn="r">
+              <a:lnSpc>
+                <a:spcPct val="100000"/>
+              </a:lnSpc>
+              <a:spcBef>
+                <a:spcPts val="0"/>
+              </a:spcBef>
+              <a:spcAft>
+                <a:spcPts val="0"/>
+              </a:spcAft>
+            </a:pPr>
+            <a:r>
+              <a:rPr sz="16500" b="1" i="0">
+                <a:solidFill>
+                  <a:srgbClr val="FFFFFF">
+                    <a:alpha val="13000"/>
+                  </a:srgbClr>
+                </a:solidFill>
+                <a:latin typeface="Calibri"/>
+              </a:rPr>
+              <a:t>02</a:t>
+            </a:r>
+          </a:p>
+        </p:txBody>
+      </p:sp>
+      <p:sp>
+        <p:nvSpPr>
+          <p:cNvPr id="4" name="TextBox 3"/>
+          <p:cNvSpPr txBox="1"/>
+          <p:nvPr/>
+        </p:nvSpPr>
+        <p:spPr>
+          <a:xfrm>
+            <a:off x="868680" y="2743200"/>
+            <a:ext cx="5318607" cy="274320"/>
+          </a:xfrm>
+          <a:prstGeom prst="rect">
+            <a:avLst/>
+          </a:prstGeom>
+          <a:noFill/>
+        </p:spPr>
+        <p:txBody>
+          <a:bodyPr wrap="square" lIns="0" rIns="0" tIns="0" bIns="0" anchor="t">
+            <a:spAutoFit/>
+          </a:bodyPr>
+          <a:lstStyle/>
+          <a:p>
+            <a:pPr algn="l">
+              <a:lnSpc>
+                <a:spcPct val="120000"/>
+              </a:lnSpc>
+              <a:spcBef>
+                <a:spcPts val="0"/>
+              </a:spcBef>
+              <a:spcAft>
+                <a:spcPts val="0"/>
+              </a:spcAft>
+            </a:pPr>
+            <a:r>
+              <a:rPr sz="1200" b="1" i="0">
+                <a:solidFill>
+                  <a:srgbClr val="F3C6CF"/>
+                </a:solidFill>
+                <a:latin typeface="Calibri"/>
+              </a:rPr>
+              <a:t>SECTION 02</a:t>
+            </a:r>
+          </a:p>
+        </p:txBody>
+      </p:sp>
+      <p:sp>
+        <p:nvSpPr>
+          <p:cNvPr id="5" name="Rectangle 4"/>
           <p:cNvSpPr/>
           <p:nvPr/>
         </p:nvSpPr>
         <p:spPr>
           <a:xfrm>
-            <a:off x="868680" y="1051560"/>
-            <a:ext cx="1325880" cy="1325880"/>
-          </a:xfrm>
-          <a:prstGeom prst="ellipse">
+            <a:off x="868680" y="3127248"/>
+            <a:ext cx="289560" cy="54864"/>
+          </a:xfrm>
+          <a:prstGeom prst="rect">
             <a:avLst/>
           </a:prstGeom>
           <a:solidFill>
-            <a:srgbClr val="A51C30"/>
+            <a:srgbClr val="00B3A4"/>
           </a:solidFill>
           <a:ln>
             <a:noFill/>
@@ -7641,31 +7733,242 @@
           </a:fontRef>
         </p:style>
         <p:txBody>
-          <a:bodyPr rtlCol="0" anchor="ctr" lIns="0" rIns="0" tIns="0" bIns="0"/>
+          <a:bodyPr rtlCol="0" anchor="ctr"/>
           <a:lstStyle/>
           <a:p>
             <a:pPr algn="ctr"/>
-            <a:r>
-              <a:rPr sz="4800" b="1">
-                <a:solidFill>
-                  <a:srgbClr val="FFFFFF"/>
-                </a:solidFill>
-                <a:latin typeface="Calibri"/>
-              </a:rPr>
-              <a:t>2</a:t>
-            </a:r>
-          </a:p>
-        </p:txBody>
-      </p:sp>
-      <p:sp>
-        <p:nvSpPr>
-          <p:cNvPr id="4" name="TextBox 3"/>
+          </a:p>
+        </p:txBody>
+      </p:sp>
+      <p:sp>
+        <p:nvSpPr>
+          <p:cNvPr id="6" name="Rectangle 5"/>
+          <p:cNvSpPr/>
+          <p:nvPr/>
+        </p:nvSpPr>
+        <p:spPr>
+          <a:xfrm>
+            <a:off x="1158240" y="3127248"/>
+            <a:ext cx="289560" cy="54864"/>
+          </a:xfrm>
+          <a:prstGeom prst="rect">
+            <a:avLst/>
+          </a:prstGeom>
+          <a:solidFill>
+            <a:srgbClr val="2FB673"/>
+          </a:solidFill>
+          <a:ln>
+            <a:noFill/>
+          </a:ln>
+          <a:effectLst/>
+        </p:spPr>
+        <p:style>
+          <a:lnRef idx="1">
+            <a:schemeClr val="accent1"/>
+          </a:lnRef>
+          <a:fillRef idx="3">
+            <a:schemeClr val="accent1"/>
+          </a:fillRef>
+          <a:effectRef idx="2">
+            <a:schemeClr val="accent1"/>
+          </a:effectRef>
+          <a:fontRef idx="minor">
+            <a:schemeClr val="lt1"/>
+          </a:fontRef>
+        </p:style>
+        <p:txBody>
+          <a:bodyPr rtlCol="0" anchor="ctr"/>
+          <a:lstStyle/>
+          <a:p>
+            <a:pPr algn="ctr"/>
+          </a:p>
+        </p:txBody>
+      </p:sp>
+      <p:sp>
+        <p:nvSpPr>
+          <p:cNvPr id="7" name="Rectangle 6"/>
+          <p:cNvSpPr/>
+          <p:nvPr/>
+        </p:nvSpPr>
+        <p:spPr>
+          <a:xfrm>
+            <a:off x="1447800" y="3127248"/>
+            <a:ext cx="289560" cy="54864"/>
+          </a:xfrm>
+          <a:prstGeom prst="rect">
+            <a:avLst/>
+          </a:prstGeom>
+          <a:solidFill>
+            <a:srgbClr val="8CBF3F"/>
+          </a:solidFill>
+          <a:ln>
+            <a:noFill/>
+          </a:ln>
+          <a:effectLst/>
+        </p:spPr>
+        <p:style>
+          <a:lnRef idx="1">
+            <a:schemeClr val="accent1"/>
+          </a:lnRef>
+          <a:fillRef idx="3">
+            <a:schemeClr val="accent1"/>
+          </a:fillRef>
+          <a:effectRef idx="2">
+            <a:schemeClr val="accent1"/>
+          </a:effectRef>
+          <a:fontRef idx="minor">
+            <a:schemeClr val="lt1"/>
+          </a:fontRef>
+        </p:style>
+        <p:txBody>
+          <a:bodyPr rtlCol="0" anchor="ctr"/>
+          <a:lstStyle/>
+          <a:p>
+            <a:pPr algn="ctr"/>
+          </a:p>
+        </p:txBody>
+      </p:sp>
+      <p:sp>
+        <p:nvSpPr>
+          <p:cNvPr id="8" name="Rectangle 7"/>
+          <p:cNvSpPr/>
+          <p:nvPr/>
+        </p:nvSpPr>
+        <p:spPr>
+          <a:xfrm>
+            <a:off x="1737360" y="3127248"/>
+            <a:ext cx="289560" cy="54864"/>
+          </a:xfrm>
+          <a:prstGeom prst="rect">
+            <a:avLst/>
+          </a:prstGeom>
+          <a:solidFill>
+            <a:srgbClr val="E8B33A"/>
+          </a:solidFill>
+          <a:ln>
+            <a:noFill/>
+          </a:ln>
+          <a:effectLst/>
+        </p:spPr>
+        <p:style>
+          <a:lnRef idx="1">
+            <a:schemeClr val="accent1"/>
+          </a:lnRef>
+          <a:fillRef idx="3">
+            <a:schemeClr val="accent1"/>
+          </a:fillRef>
+          <a:effectRef idx="2">
+            <a:schemeClr val="accent1"/>
+          </a:effectRef>
+          <a:fontRef idx="minor">
+            <a:schemeClr val="lt1"/>
+          </a:fontRef>
+        </p:style>
+        <p:txBody>
+          <a:bodyPr rtlCol="0" anchor="ctr"/>
+          <a:lstStyle/>
+          <a:p>
+            <a:pPr algn="ctr"/>
+          </a:p>
+        </p:txBody>
+      </p:sp>
+      <p:sp>
+        <p:nvSpPr>
+          <p:cNvPr id="9" name="Rectangle 8"/>
+          <p:cNvSpPr/>
+          <p:nvPr/>
+        </p:nvSpPr>
+        <p:spPr>
+          <a:xfrm>
+            <a:off x="2026920" y="3127248"/>
+            <a:ext cx="289560" cy="54864"/>
+          </a:xfrm>
+          <a:prstGeom prst="rect">
+            <a:avLst/>
+          </a:prstGeom>
+          <a:solidFill>
+            <a:srgbClr val="E8823A"/>
+          </a:solidFill>
+          <a:ln>
+            <a:noFill/>
+          </a:ln>
+          <a:effectLst/>
+        </p:spPr>
+        <p:style>
+          <a:lnRef idx="1">
+            <a:schemeClr val="accent1"/>
+          </a:lnRef>
+          <a:fillRef idx="3">
+            <a:schemeClr val="accent1"/>
+          </a:fillRef>
+          <a:effectRef idx="2">
+            <a:schemeClr val="accent1"/>
+          </a:effectRef>
+          <a:fontRef idx="minor">
+            <a:schemeClr val="lt1"/>
+          </a:fontRef>
+        </p:style>
+        <p:txBody>
+          <a:bodyPr rtlCol="0" anchor="ctr"/>
+          <a:lstStyle/>
+          <a:p>
+            <a:pPr algn="ctr"/>
+          </a:p>
+        </p:txBody>
+      </p:sp>
+      <p:sp>
+        <p:nvSpPr>
+          <p:cNvPr id="10" name="Rectangle 9"/>
+          <p:cNvSpPr/>
+          <p:nvPr/>
+        </p:nvSpPr>
+        <p:spPr>
+          <a:xfrm>
+            <a:off x="2316480" y="3127248"/>
+            <a:ext cx="289560" cy="54864"/>
+          </a:xfrm>
+          <a:prstGeom prst="rect">
+            <a:avLst/>
+          </a:prstGeom>
+          <a:solidFill>
+            <a:srgbClr val="D9534F"/>
+          </a:solidFill>
+          <a:ln>
+            <a:noFill/>
+          </a:ln>
+          <a:effectLst/>
+        </p:spPr>
+        <p:style>
+          <a:lnRef idx="1">
+            <a:schemeClr val="accent1"/>
+          </a:lnRef>
+          <a:fillRef idx="3">
+            <a:schemeClr val="accent1"/>
+          </a:fillRef>
+          <a:effectRef idx="2">
+            <a:schemeClr val="accent1"/>
+          </a:effectRef>
+          <a:fontRef idx="minor">
+            <a:schemeClr val="lt1"/>
+          </a:fontRef>
+        </p:style>
+        <p:txBody>
+          <a:bodyPr rtlCol="0" anchor="ctr"/>
+          <a:lstStyle/>
+          <a:p>
+            <a:pPr algn="ctr"/>
+          </a:p>
+        </p:txBody>
+      </p:sp>
+      <p:sp>
+        <p:nvSpPr>
+          <p:cNvPr id="11" name="TextBox 10"/>
           <p:cNvSpPr txBox="1"/>
           <p:nvPr/>
         </p:nvSpPr>
         <p:spPr>
           <a:xfrm>
-            <a:off x="868680" y="2697480"/>
+            <a:off x="868680" y="3310128"/>
             <a:ext cx="5956840" cy="688340"/>
           </a:xfrm>
           <a:prstGeom prst="rect">
@@ -7704,14 +8007,14 @@
       </p:sp>
       <p:sp>
         <p:nvSpPr>
-          <p:cNvPr id="5" name="TextBox 4"/>
+          <p:cNvPr id="12" name="TextBox 11"/>
           <p:cNvSpPr txBox="1"/>
           <p:nvPr/>
         </p:nvSpPr>
         <p:spPr>
           <a:xfrm>
-            <a:off x="868680" y="3614420"/>
-            <a:ext cx="5956840" cy="2603499"/>
+            <a:off x="868680" y="4190491"/>
+            <a:ext cx="5956840" cy="2027428"/>
           </a:xfrm>
           <a:prstGeom prst="rect">
             <a:avLst/>
@@ -7749,13 +8052,13 @@
       </p:sp>
       <p:sp>
         <p:nvSpPr>
-          <p:cNvPr id="6" name="TextBox 5"/>
+          <p:cNvPr id="13" name="TextBox 12"/>
           <p:cNvSpPr txBox="1"/>
           <p:nvPr/>
         </p:nvSpPr>
         <p:spPr>
           <a:xfrm>
-            <a:off x="7585057" y="1097280"/>
+            <a:off x="7585057" y="2788920"/>
             <a:ext cx="3829397" cy="274320"/>
           </a:xfrm>
           <a:prstGeom prst="rect">
@@ -7794,14 +8097,14 @@
       </p:sp>
       <p:sp>
         <p:nvSpPr>
-          <p:cNvPr id="7" name="TextBox 6"/>
+          <p:cNvPr id="14" name="TextBox 13"/>
           <p:cNvSpPr txBox="1"/>
           <p:nvPr/>
         </p:nvSpPr>
         <p:spPr>
           <a:xfrm>
-            <a:off x="7585057" y="1481328"/>
-            <a:ext cx="3829397" cy="4206240"/>
+            <a:off x="7585057" y="3154680"/>
+            <a:ext cx="3829397" cy="3063239"/>
           </a:xfrm>
           <a:prstGeom prst="rect">
             <a:avLst/>
@@ -7822,11 +8125,11 @@
                 <a:spcPts val="0"/>
               </a:spcBef>
               <a:spcAft>
-                <a:spcPts val="900"/>
-              </a:spcAft>
-            </a:pPr>
-            <a:r>
-              <a:rPr sz="1500" b="1">
+                <a:spcPts val="800"/>
+              </a:spcAft>
+            </a:pPr>
+            <a:r>
+              <a:rPr sz="1400" b="1">
                 <a:solidFill>
                   <a:srgbClr val="F3C6CF"/>
                 </a:solidFill>
@@ -7835,7 +8138,7 @@
               <a:t>01   </a:t>
             </a:r>
             <a:r>
-              <a:rPr sz="1500" b="0">
+              <a:rPr sz="1400" b="0">
                 <a:solidFill>
                   <a:srgbClr val="FFFFFF"/>
                 </a:solidFill>
@@ -7853,11 +8156,11 @@
                 <a:spcPts val="0"/>
               </a:spcBef>
               <a:spcAft>
-                <a:spcPts val="900"/>
-              </a:spcAft>
-            </a:pPr>
-            <a:r>
-              <a:rPr sz="1500" b="1">
+                <a:spcPts val="800"/>
+              </a:spcAft>
+            </a:pPr>
+            <a:r>
+              <a:rPr sz="1400" b="1">
                 <a:solidFill>
                   <a:srgbClr val="F3C6CF"/>
                 </a:solidFill>
@@ -7866,7 +8169,7 @@
               <a:t>02   </a:t>
             </a:r>
             <a:r>
-              <a:rPr sz="1500" b="0">
+              <a:rPr sz="1400" b="0">
                 <a:solidFill>
                   <a:srgbClr val="FFFFFF"/>
                 </a:solidFill>
@@ -7884,11 +8187,11 @@
                 <a:spcPts val="0"/>
               </a:spcBef>
               <a:spcAft>
-                <a:spcPts val="900"/>
-              </a:spcAft>
-            </a:pPr>
-            <a:r>
-              <a:rPr sz="1500" b="1">
+                <a:spcPts val="800"/>
+              </a:spcAft>
+            </a:pPr>
+            <a:r>
+              <a:rPr sz="1400" b="1">
                 <a:solidFill>
                   <a:srgbClr val="F3C6CF"/>
                 </a:solidFill>
@@ -7897,7 +8200,7 @@
               <a:t>03   </a:t>
             </a:r>
             <a:r>
-              <a:rPr sz="1500" b="0">
+              <a:rPr sz="1400" b="0">
                 <a:solidFill>
                   <a:srgbClr val="FFFFFF"/>
                 </a:solidFill>
@@ -7915,11 +8218,11 @@
                 <a:spcPts val="0"/>
               </a:spcBef>
               <a:spcAft>
-                <a:spcPts val="900"/>
-              </a:spcAft>
-            </a:pPr>
-            <a:r>
-              <a:rPr sz="1500" b="1">
+                <a:spcPts val="800"/>
+              </a:spcAft>
+            </a:pPr>
+            <a:r>
+              <a:rPr sz="1400" b="1">
                 <a:solidFill>
                   <a:srgbClr val="F3C6CF"/>
                 </a:solidFill>
@@ -7928,7 +8231,7 @@
               <a:t>04   </a:t>
             </a:r>
             <a:r>
-              <a:rPr sz="1500" b="0">
+              <a:rPr sz="1400" b="0">
                 <a:solidFill>
                   <a:srgbClr val="FFFFFF"/>
                 </a:solidFill>
@@ -7946,11 +8249,11 @@
                 <a:spcPts val="0"/>
               </a:spcBef>
               <a:spcAft>
-                <a:spcPts val="900"/>
-              </a:spcAft>
-            </a:pPr>
-            <a:r>
-              <a:rPr sz="1500" b="1">
+                <a:spcPts val="800"/>
+              </a:spcAft>
+            </a:pPr>
+            <a:r>
+              <a:rPr sz="1400" b="1">
                 <a:solidFill>
                   <a:srgbClr val="F3C6CF"/>
                 </a:solidFill>
@@ -7959,7 +8262,7 @@
               <a:t>05   </a:t>
             </a:r>
             <a:r>
-              <a:rPr sz="1500" b="0">
+              <a:rPr sz="1400" b="0">
                 <a:solidFill>
                   <a:srgbClr val="FFFFFF"/>
                 </a:solidFill>
@@ -13944,20 +14247,112 @@
       </p:sp>
       <p:sp>
         <p:nvSpPr>
-          <p:cNvPr id="3" name="Oval 2"/>
+          <p:cNvPr id="3" name="TextBox 2"/>
+          <p:cNvSpPr txBox="1"/>
+          <p:nvPr/>
+        </p:nvSpPr>
+        <p:spPr>
+          <a:xfrm>
+            <a:off x="5244870" y="137160"/>
+            <a:ext cx="6169584" cy="2514600"/>
+          </a:xfrm>
+          <a:prstGeom prst="rect">
+            <a:avLst/>
+          </a:prstGeom>
+          <a:noFill/>
+        </p:spPr>
+        <p:txBody>
+          <a:bodyPr wrap="square" lIns="0" rIns="0" tIns="0" bIns="0" anchor="t">
+            <a:spAutoFit/>
+          </a:bodyPr>
+          <a:lstStyle/>
+          <a:p>
+            <a:pPr algn="r">
+              <a:lnSpc>
+                <a:spcPct val="100000"/>
+              </a:lnSpc>
+              <a:spcBef>
+                <a:spcPts val="0"/>
+              </a:spcBef>
+              <a:spcAft>
+                <a:spcPts val="0"/>
+              </a:spcAft>
+            </a:pPr>
+            <a:r>
+              <a:rPr sz="16500" b="1" i="0">
+                <a:solidFill>
+                  <a:srgbClr val="FFFFFF">
+                    <a:alpha val="13000"/>
+                  </a:srgbClr>
+                </a:solidFill>
+                <a:latin typeface="Calibri"/>
+              </a:rPr>
+              <a:t>03</a:t>
+            </a:r>
+          </a:p>
+        </p:txBody>
+      </p:sp>
+      <p:sp>
+        <p:nvSpPr>
+          <p:cNvPr id="4" name="TextBox 3"/>
+          <p:cNvSpPr txBox="1"/>
+          <p:nvPr/>
+        </p:nvSpPr>
+        <p:spPr>
+          <a:xfrm>
+            <a:off x="868680" y="2743200"/>
+            <a:ext cx="5318607" cy="274320"/>
+          </a:xfrm>
+          <a:prstGeom prst="rect">
+            <a:avLst/>
+          </a:prstGeom>
+          <a:noFill/>
+        </p:spPr>
+        <p:txBody>
+          <a:bodyPr wrap="square" lIns="0" rIns="0" tIns="0" bIns="0" anchor="t">
+            <a:spAutoFit/>
+          </a:bodyPr>
+          <a:lstStyle/>
+          <a:p>
+            <a:pPr algn="l">
+              <a:lnSpc>
+                <a:spcPct val="120000"/>
+              </a:lnSpc>
+              <a:spcBef>
+                <a:spcPts val="0"/>
+              </a:spcBef>
+              <a:spcAft>
+                <a:spcPts val="0"/>
+              </a:spcAft>
+            </a:pPr>
+            <a:r>
+              <a:rPr sz="1200" b="1" i="0">
+                <a:solidFill>
+                  <a:srgbClr val="F3C6CF"/>
+                </a:solidFill>
+                <a:latin typeface="Calibri"/>
+              </a:rPr>
+              <a:t>SECTION 03</a:t>
+            </a:r>
+          </a:p>
+        </p:txBody>
+      </p:sp>
+      <p:sp>
+        <p:nvSpPr>
+          <p:cNvPr id="5" name="Rectangle 4"/>
           <p:cNvSpPr/>
           <p:nvPr/>
         </p:nvSpPr>
         <p:spPr>
           <a:xfrm>
-            <a:off x="868680" y="1051560"/>
-            <a:ext cx="1325880" cy="1325880"/>
-          </a:xfrm>
-          <a:prstGeom prst="ellipse">
+            <a:off x="868680" y="3127248"/>
+            <a:ext cx="289560" cy="54864"/>
+          </a:xfrm>
+          <a:prstGeom prst="rect">
             <a:avLst/>
           </a:prstGeom>
           <a:solidFill>
-            <a:srgbClr val="A51C30"/>
+            <a:srgbClr val="00B3A4"/>
           </a:solidFill>
           <a:ln>
             <a:noFill/>
@@ -13979,31 +14374,242 @@
           </a:fontRef>
         </p:style>
         <p:txBody>
-          <a:bodyPr rtlCol="0" anchor="ctr" lIns="0" rIns="0" tIns="0" bIns="0"/>
+          <a:bodyPr rtlCol="0" anchor="ctr"/>
           <a:lstStyle/>
           <a:p>
             <a:pPr algn="ctr"/>
-            <a:r>
-              <a:rPr sz="4800" b="1">
-                <a:solidFill>
-                  <a:srgbClr val="FFFFFF"/>
-                </a:solidFill>
-                <a:latin typeface="Calibri"/>
-              </a:rPr>
-              <a:t>3</a:t>
-            </a:r>
-          </a:p>
-        </p:txBody>
-      </p:sp>
-      <p:sp>
-        <p:nvSpPr>
-          <p:cNvPr id="4" name="TextBox 3"/>
+          </a:p>
+        </p:txBody>
+      </p:sp>
+      <p:sp>
+        <p:nvSpPr>
+          <p:cNvPr id="6" name="Rectangle 5"/>
+          <p:cNvSpPr/>
+          <p:nvPr/>
+        </p:nvSpPr>
+        <p:spPr>
+          <a:xfrm>
+            <a:off x="1158240" y="3127248"/>
+            <a:ext cx="289560" cy="54864"/>
+          </a:xfrm>
+          <a:prstGeom prst="rect">
+            <a:avLst/>
+          </a:prstGeom>
+          <a:solidFill>
+            <a:srgbClr val="2FB673"/>
+          </a:solidFill>
+          <a:ln>
+            <a:noFill/>
+          </a:ln>
+          <a:effectLst/>
+        </p:spPr>
+        <p:style>
+          <a:lnRef idx="1">
+            <a:schemeClr val="accent1"/>
+          </a:lnRef>
+          <a:fillRef idx="3">
+            <a:schemeClr val="accent1"/>
+          </a:fillRef>
+          <a:effectRef idx="2">
+            <a:schemeClr val="accent1"/>
+          </a:effectRef>
+          <a:fontRef idx="minor">
+            <a:schemeClr val="lt1"/>
+          </a:fontRef>
+        </p:style>
+        <p:txBody>
+          <a:bodyPr rtlCol="0" anchor="ctr"/>
+          <a:lstStyle/>
+          <a:p>
+            <a:pPr algn="ctr"/>
+          </a:p>
+        </p:txBody>
+      </p:sp>
+      <p:sp>
+        <p:nvSpPr>
+          <p:cNvPr id="7" name="Rectangle 6"/>
+          <p:cNvSpPr/>
+          <p:nvPr/>
+        </p:nvSpPr>
+        <p:spPr>
+          <a:xfrm>
+            <a:off x="1447800" y="3127248"/>
+            <a:ext cx="289560" cy="54864"/>
+          </a:xfrm>
+          <a:prstGeom prst="rect">
+            <a:avLst/>
+          </a:prstGeom>
+          <a:solidFill>
+            <a:srgbClr val="8CBF3F"/>
+          </a:solidFill>
+          <a:ln>
+            <a:noFill/>
+          </a:ln>
+          <a:effectLst/>
+        </p:spPr>
+        <p:style>
+          <a:lnRef idx="1">
+            <a:schemeClr val="accent1"/>
+          </a:lnRef>
+          <a:fillRef idx="3">
+            <a:schemeClr val="accent1"/>
+          </a:fillRef>
+          <a:effectRef idx="2">
+            <a:schemeClr val="accent1"/>
+          </a:effectRef>
+          <a:fontRef idx="minor">
+            <a:schemeClr val="lt1"/>
+          </a:fontRef>
+        </p:style>
+        <p:txBody>
+          <a:bodyPr rtlCol="0" anchor="ctr"/>
+          <a:lstStyle/>
+          <a:p>
+            <a:pPr algn="ctr"/>
+          </a:p>
+        </p:txBody>
+      </p:sp>
+      <p:sp>
+        <p:nvSpPr>
+          <p:cNvPr id="8" name="Rectangle 7"/>
+          <p:cNvSpPr/>
+          <p:nvPr/>
+        </p:nvSpPr>
+        <p:spPr>
+          <a:xfrm>
+            <a:off x="1737360" y="3127248"/>
+            <a:ext cx="289560" cy="54864"/>
+          </a:xfrm>
+          <a:prstGeom prst="rect">
+            <a:avLst/>
+          </a:prstGeom>
+          <a:solidFill>
+            <a:srgbClr val="E8B33A"/>
+          </a:solidFill>
+          <a:ln>
+            <a:noFill/>
+          </a:ln>
+          <a:effectLst/>
+        </p:spPr>
+        <p:style>
+          <a:lnRef idx="1">
+            <a:schemeClr val="accent1"/>
+          </a:lnRef>
+          <a:fillRef idx="3">
+            <a:schemeClr val="accent1"/>
+          </a:fillRef>
+          <a:effectRef idx="2">
+            <a:schemeClr val="accent1"/>
+          </a:effectRef>
+          <a:fontRef idx="minor">
+            <a:schemeClr val="lt1"/>
+          </a:fontRef>
+        </p:style>
+        <p:txBody>
+          <a:bodyPr rtlCol="0" anchor="ctr"/>
+          <a:lstStyle/>
+          <a:p>
+            <a:pPr algn="ctr"/>
+          </a:p>
+        </p:txBody>
+      </p:sp>
+      <p:sp>
+        <p:nvSpPr>
+          <p:cNvPr id="9" name="Rectangle 8"/>
+          <p:cNvSpPr/>
+          <p:nvPr/>
+        </p:nvSpPr>
+        <p:spPr>
+          <a:xfrm>
+            <a:off x="2026920" y="3127248"/>
+            <a:ext cx="289560" cy="54864"/>
+          </a:xfrm>
+          <a:prstGeom prst="rect">
+            <a:avLst/>
+          </a:prstGeom>
+          <a:solidFill>
+            <a:srgbClr val="E8823A"/>
+          </a:solidFill>
+          <a:ln>
+            <a:noFill/>
+          </a:ln>
+          <a:effectLst/>
+        </p:spPr>
+        <p:style>
+          <a:lnRef idx="1">
+            <a:schemeClr val="accent1"/>
+          </a:lnRef>
+          <a:fillRef idx="3">
+            <a:schemeClr val="accent1"/>
+          </a:fillRef>
+          <a:effectRef idx="2">
+            <a:schemeClr val="accent1"/>
+          </a:effectRef>
+          <a:fontRef idx="minor">
+            <a:schemeClr val="lt1"/>
+          </a:fontRef>
+        </p:style>
+        <p:txBody>
+          <a:bodyPr rtlCol="0" anchor="ctr"/>
+          <a:lstStyle/>
+          <a:p>
+            <a:pPr algn="ctr"/>
+          </a:p>
+        </p:txBody>
+      </p:sp>
+      <p:sp>
+        <p:nvSpPr>
+          <p:cNvPr id="10" name="Rectangle 9"/>
+          <p:cNvSpPr/>
+          <p:nvPr/>
+        </p:nvSpPr>
+        <p:spPr>
+          <a:xfrm>
+            <a:off x="2316480" y="3127248"/>
+            <a:ext cx="289560" cy="54864"/>
+          </a:xfrm>
+          <a:prstGeom prst="rect">
+            <a:avLst/>
+          </a:prstGeom>
+          <a:solidFill>
+            <a:srgbClr val="D9534F"/>
+          </a:solidFill>
+          <a:ln>
+            <a:noFill/>
+          </a:ln>
+          <a:effectLst/>
+        </p:spPr>
+        <p:style>
+          <a:lnRef idx="1">
+            <a:schemeClr val="accent1"/>
+          </a:lnRef>
+          <a:fillRef idx="3">
+            <a:schemeClr val="accent1"/>
+          </a:fillRef>
+          <a:effectRef idx="2">
+            <a:schemeClr val="accent1"/>
+          </a:effectRef>
+          <a:fontRef idx="minor">
+            <a:schemeClr val="lt1"/>
+          </a:fontRef>
+        </p:style>
+        <p:txBody>
+          <a:bodyPr rtlCol="0" anchor="ctr"/>
+          <a:lstStyle/>
+          <a:p>
+            <a:pPr algn="ctr"/>
+          </a:p>
+        </p:txBody>
+      </p:sp>
+      <p:sp>
+        <p:nvSpPr>
+          <p:cNvPr id="11" name="TextBox 10"/>
           <p:cNvSpPr txBox="1"/>
           <p:nvPr/>
         </p:nvSpPr>
         <p:spPr>
           <a:xfrm>
-            <a:off x="868680" y="2697480"/>
+            <a:off x="868680" y="3310128"/>
             <a:ext cx="5956840" cy="688340"/>
           </a:xfrm>
           <a:prstGeom prst="rect">
@@ -14042,14 +14648,14 @@
       </p:sp>
       <p:sp>
         <p:nvSpPr>
-          <p:cNvPr id="5" name="TextBox 4"/>
+          <p:cNvPr id="12" name="TextBox 11"/>
           <p:cNvSpPr txBox="1"/>
           <p:nvPr/>
         </p:nvSpPr>
         <p:spPr>
           <a:xfrm>
-            <a:off x="868680" y="3614420"/>
-            <a:ext cx="5956840" cy="2603499"/>
+            <a:off x="868680" y="4190491"/>
+            <a:ext cx="5956840" cy="2027428"/>
           </a:xfrm>
           <a:prstGeom prst="rect">
             <a:avLst/>
@@ -14087,13 +14693,13 @@
       </p:sp>
       <p:sp>
         <p:nvSpPr>
-          <p:cNvPr id="6" name="TextBox 5"/>
+          <p:cNvPr id="13" name="TextBox 12"/>
           <p:cNvSpPr txBox="1"/>
           <p:nvPr/>
         </p:nvSpPr>
         <p:spPr>
           <a:xfrm>
-            <a:off x="7585057" y="1097280"/>
+            <a:off x="7585057" y="2788920"/>
             <a:ext cx="3829397" cy="274320"/>
           </a:xfrm>
           <a:prstGeom prst="rect">
@@ -14132,14 +14738,14 @@
       </p:sp>
       <p:sp>
         <p:nvSpPr>
-          <p:cNvPr id="7" name="TextBox 6"/>
+          <p:cNvPr id="14" name="TextBox 13"/>
           <p:cNvSpPr txBox="1"/>
           <p:nvPr/>
         </p:nvSpPr>
         <p:spPr>
           <a:xfrm>
-            <a:off x="7585057" y="1481328"/>
-            <a:ext cx="3829397" cy="4206240"/>
+            <a:off x="7585057" y="3154680"/>
+            <a:ext cx="3829397" cy="3063239"/>
           </a:xfrm>
           <a:prstGeom prst="rect">
             <a:avLst/>
@@ -14160,11 +14766,11 @@
                 <a:spcPts val="0"/>
               </a:spcBef>
               <a:spcAft>
-                <a:spcPts val="900"/>
-              </a:spcAft>
-            </a:pPr>
-            <a:r>
-              <a:rPr sz="1500" b="1">
+                <a:spcPts val="800"/>
+              </a:spcAft>
+            </a:pPr>
+            <a:r>
+              <a:rPr sz="1400" b="1">
                 <a:solidFill>
                   <a:srgbClr val="F3C6CF"/>
                 </a:solidFill>
@@ -14173,7 +14779,7 @@
               <a:t>01   </a:t>
             </a:r>
             <a:r>
-              <a:rPr sz="1500" b="0">
+              <a:rPr sz="1400" b="0">
                 <a:solidFill>
                   <a:srgbClr val="FFFFFF"/>
                 </a:solidFill>
@@ -14191,11 +14797,11 @@
                 <a:spcPts val="0"/>
               </a:spcBef>
               <a:spcAft>
-                <a:spcPts val="900"/>
-              </a:spcAft>
-            </a:pPr>
-            <a:r>
-              <a:rPr sz="1500" b="1">
+                <a:spcPts val="800"/>
+              </a:spcAft>
+            </a:pPr>
+            <a:r>
+              <a:rPr sz="1400" b="1">
                 <a:solidFill>
                   <a:srgbClr val="F3C6CF"/>
                 </a:solidFill>
@@ -14204,7 +14810,7 @@
               <a:t>02   </a:t>
             </a:r>
             <a:r>
-              <a:rPr sz="1500" b="0">
+              <a:rPr sz="1400" b="0">
                 <a:solidFill>
                   <a:srgbClr val="FFFFFF"/>
                 </a:solidFill>
@@ -14222,11 +14828,11 @@
                 <a:spcPts val="0"/>
               </a:spcBef>
               <a:spcAft>
-                <a:spcPts val="900"/>
-              </a:spcAft>
-            </a:pPr>
-            <a:r>
-              <a:rPr sz="1500" b="1">
+                <a:spcPts val="800"/>
+              </a:spcAft>
+            </a:pPr>
+            <a:r>
+              <a:rPr sz="1400" b="1">
                 <a:solidFill>
                   <a:srgbClr val="F3C6CF"/>
                 </a:solidFill>
@@ -14235,7 +14841,7 @@
               <a:t>03   </a:t>
             </a:r>
             <a:r>
-              <a:rPr sz="1500" b="0">
+              <a:rPr sz="1400" b="0">
                 <a:solidFill>
                   <a:srgbClr val="FFFFFF"/>
                 </a:solidFill>
@@ -17089,20 +17695,112 @@
       </p:sp>
       <p:sp>
         <p:nvSpPr>
-          <p:cNvPr id="3" name="Oval 2"/>
+          <p:cNvPr id="3" name="TextBox 2"/>
+          <p:cNvSpPr txBox="1"/>
+          <p:nvPr/>
+        </p:nvSpPr>
+        <p:spPr>
+          <a:xfrm>
+            <a:off x="5244870" y="137160"/>
+            <a:ext cx="6169584" cy="2514600"/>
+          </a:xfrm>
+          <a:prstGeom prst="rect">
+            <a:avLst/>
+          </a:prstGeom>
+          <a:noFill/>
+        </p:spPr>
+        <p:txBody>
+          <a:bodyPr wrap="square" lIns="0" rIns="0" tIns="0" bIns="0" anchor="t">
+            <a:spAutoFit/>
+          </a:bodyPr>
+          <a:lstStyle/>
+          <a:p>
+            <a:pPr algn="r">
+              <a:lnSpc>
+                <a:spcPct val="100000"/>
+              </a:lnSpc>
+              <a:spcBef>
+                <a:spcPts val="0"/>
+              </a:spcBef>
+              <a:spcAft>
+                <a:spcPts val="0"/>
+              </a:spcAft>
+            </a:pPr>
+            <a:r>
+              <a:rPr sz="16500" b="1" i="0">
+                <a:solidFill>
+                  <a:srgbClr val="FFFFFF">
+                    <a:alpha val="13000"/>
+                  </a:srgbClr>
+                </a:solidFill>
+                <a:latin typeface="Calibri"/>
+              </a:rPr>
+              <a:t>04</a:t>
+            </a:r>
+          </a:p>
+        </p:txBody>
+      </p:sp>
+      <p:sp>
+        <p:nvSpPr>
+          <p:cNvPr id="4" name="TextBox 3"/>
+          <p:cNvSpPr txBox="1"/>
+          <p:nvPr/>
+        </p:nvSpPr>
+        <p:spPr>
+          <a:xfrm>
+            <a:off x="868680" y="2743200"/>
+            <a:ext cx="5318607" cy="274320"/>
+          </a:xfrm>
+          <a:prstGeom prst="rect">
+            <a:avLst/>
+          </a:prstGeom>
+          <a:noFill/>
+        </p:spPr>
+        <p:txBody>
+          <a:bodyPr wrap="square" lIns="0" rIns="0" tIns="0" bIns="0" anchor="t">
+            <a:spAutoFit/>
+          </a:bodyPr>
+          <a:lstStyle/>
+          <a:p>
+            <a:pPr algn="l">
+              <a:lnSpc>
+                <a:spcPct val="120000"/>
+              </a:lnSpc>
+              <a:spcBef>
+                <a:spcPts val="0"/>
+              </a:spcBef>
+              <a:spcAft>
+                <a:spcPts val="0"/>
+              </a:spcAft>
+            </a:pPr>
+            <a:r>
+              <a:rPr sz="1200" b="1" i="0">
+                <a:solidFill>
+                  <a:srgbClr val="F3C6CF"/>
+                </a:solidFill>
+                <a:latin typeface="Calibri"/>
+              </a:rPr>
+              <a:t>SECTION 04</a:t>
+            </a:r>
+          </a:p>
+        </p:txBody>
+      </p:sp>
+      <p:sp>
+        <p:nvSpPr>
+          <p:cNvPr id="5" name="Rectangle 4"/>
           <p:cNvSpPr/>
           <p:nvPr/>
         </p:nvSpPr>
         <p:spPr>
           <a:xfrm>
-            <a:off x="868680" y="1051560"/>
-            <a:ext cx="1325880" cy="1325880"/>
-          </a:xfrm>
-          <a:prstGeom prst="ellipse">
+            <a:off x="868680" y="3127248"/>
+            <a:ext cx="289560" cy="54864"/>
+          </a:xfrm>
+          <a:prstGeom prst="rect">
             <a:avLst/>
           </a:prstGeom>
           <a:solidFill>
-            <a:srgbClr val="A51C30"/>
+            <a:srgbClr val="00B3A4"/>
           </a:solidFill>
           <a:ln>
             <a:noFill/>
@@ -17124,31 +17822,242 @@
           </a:fontRef>
         </p:style>
         <p:txBody>
-          <a:bodyPr rtlCol="0" anchor="ctr" lIns="0" rIns="0" tIns="0" bIns="0"/>
+          <a:bodyPr rtlCol="0" anchor="ctr"/>
           <a:lstStyle/>
           <a:p>
             <a:pPr algn="ctr"/>
-            <a:r>
-              <a:rPr sz="4800" b="1">
-                <a:solidFill>
-                  <a:srgbClr val="FFFFFF"/>
-                </a:solidFill>
-                <a:latin typeface="Calibri"/>
-              </a:rPr>
-              <a:t>4</a:t>
-            </a:r>
-          </a:p>
-        </p:txBody>
-      </p:sp>
-      <p:sp>
-        <p:nvSpPr>
-          <p:cNvPr id="4" name="TextBox 3"/>
+          </a:p>
+        </p:txBody>
+      </p:sp>
+      <p:sp>
+        <p:nvSpPr>
+          <p:cNvPr id="6" name="Rectangle 5"/>
+          <p:cNvSpPr/>
+          <p:nvPr/>
+        </p:nvSpPr>
+        <p:spPr>
+          <a:xfrm>
+            <a:off x="1158240" y="3127248"/>
+            <a:ext cx="289560" cy="54864"/>
+          </a:xfrm>
+          <a:prstGeom prst="rect">
+            <a:avLst/>
+          </a:prstGeom>
+          <a:solidFill>
+            <a:srgbClr val="2FB673"/>
+          </a:solidFill>
+          <a:ln>
+            <a:noFill/>
+          </a:ln>
+          <a:effectLst/>
+        </p:spPr>
+        <p:style>
+          <a:lnRef idx="1">
+            <a:schemeClr val="accent1"/>
+          </a:lnRef>
+          <a:fillRef idx="3">
+            <a:schemeClr val="accent1"/>
+          </a:fillRef>
+          <a:effectRef idx="2">
+            <a:schemeClr val="accent1"/>
+          </a:effectRef>
+          <a:fontRef idx="minor">
+            <a:schemeClr val="lt1"/>
+          </a:fontRef>
+        </p:style>
+        <p:txBody>
+          <a:bodyPr rtlCol="0" anchor="ctr"/>
+          <a:lstStyle/>
+          <a:p>
+            <a:pPr algn="ctr"/>
+          </a:p>
+        </p:txBody>
+      </p:sp>
+      <p:sp>
+        <p:nvSpPr>
+          <p:cNvPr id="7" name="Rectangle 6"/>
+          <p:cNvSpPr/>
+          <p:nvPr/>
+        </p:nvSpPr>
+        <p:spPr>
+          <a:xfrm>
+            <a:off x="1447800" y="3127248"/>
+            <a:ext cx="289560" cy="54864"/>
+          </a:xfrm>
+          <a:prstGeom prst="rect">
+            <a:avLst/>
+          </a:prstGeom>
+          <a:solidFill>
+            <a:srgbClr val="8CBF3F"/>
+          </a:solidFill>
+          <a:ln>
+            <a:noFill/>
+          </a:ln>
+          <a:effectLst/>
+        </p:spPr>
+        <p:style>
+          <a:lnRef idx="1">
+            <a:schemeClr val="accent1"/>
+          </a:lnRef>
+          <a:fillRef idx="3">
+            <a:schemeClr val="accent1"/>
+          </a:fillRef>
+          <a:effectRef idx="2">
+            <a:schemeClr val="accent1"/>
+          </a:effectRef>
+          <a:fontRef idx="minor">
+            <a:schemeClr val="lt1"/>
+          </a:fontRef>
+        </p:style>
+        <p:txBody>
+          <a:bodyPr rtlCol="0" anchor="ctr"/>
+          <a:lstStyle/>
+          <a:p>
+            <a:pPr algn="ctr"/>
+          </a:p>
+        </p:txBody>
+      </p:sp>
+      <p:sp>
+        <p:nvSpPr>
+          <p:cNvPr id="8" name="Rectangle 7"/>
+          <p:cNvSpPr/>
+          <p:nvPr/>
+        </p:nvSpPr>
+        <p:spPr>
+          <a:xfrm>
+            <a:off x="1737360" y="3127248"/>
+            <a:ext cx="289560" cy="54864"/>
+          </a:xfrm>
+          <a:prstGeom prst="rect">
+            <a:avLst/>
+          </a:prstGeom>
+          <a:solidFill>
+            <a:srgbClr val="E8B33A"/>
+          </a:solidFill>
+          <a:ln>
+            <a:noFill/>
+          </a:ln>
+          <a:effectLst/>
+        </p:spPr>
+        <p:style>
+          <a:lnRef idx="1">
+            <a:schemeClr val="accent1"/>
+          </a:lnRef>
+          <a:fillRef idx="3">
+            <a:schemeClr val="accent1"/>
+          </a:fillRef>
+          <a:effectRef idx="2">
+            <a:schemeClr val="accent1"/>
+          </a:effectRef>
+          <a:fontRef idx="minor">
+            <a:schemeClr val="lt1"/>
+          </a:fontRef>
+        </p:style>
+        <p:txBody>
+          <a:bodyPr rtlCol="0" anchor="ctr"/>
+          <a:lstStyle/>
+          <a:p>
+            <a:pPr algn="ctr"/>
+          </a:p>
+        </p:txBody>
+      </p:sp>
+      <p:sp>
+        <p:nvSpPr>
+          <p:cNvPr id="9" name="Rectangle 8"/>
+          <p:cNvSpPr/>
+          <p:nvPr/>
+        </p:nvSpPr>
+        <p:spPr>
+          <a:xfrm>
+            <a:off x="2026920" y="3127248"/>
+            <a:ext cx="289560" cy="54864"/>
+          </a:xfrm>
+          <a:prstGeom prst="rect">
+            <a:avLst/>
+          </a:prstGeom>
+          <a:solidFill>
+            <a:srgbClr val="E8823A"/>
+          </a:solidFill>
+          <a:ln>
+            <a:noFill/>
+          </a:ln>
+          <a:effectLst/>
+        </p:spPr>
+        <p:style>
+          <a:lnRef idx="1">
+            <a:schemeClr val="accent1"/>
+          </a:lnRef>
+          <a:fillRef idx="3">
+            <a:schemeClr val="accent1"/>
+          </a:fillRef>
+          <a:effectRef idx="2">
+            <a:schemeClr val="accent1"/>
+          </a:effectRef>
+          <a:fontRef idx="minor">
+            <a:schemeClr val="lt1"/>
+          </a:fontRef>
+        </p:style>
+        <p:txBody>
+          <a:bodyPr rtlCol="0" anchor="ctr"/>
+          <a:lstStyle/>
+          <a:p>
+            <a:pPr algn="ctr"/>
+          </a:p>
+        </p:txBody>
+      </p:sp>
+      <p:sp>
+        <p:nvSpPr>
+          <p:cNvPr id="10" name="Rectangle 9"/>
+          <p:cNvSpPr/>
+          <p:nvPr/>
+        </p:nvSpPr>
+        <p:spPr>
+          <a:xfrm>
+            <a:off x="2316480" y="3127248"/>
+            <a:ext cx="289560" cy="54864"/>
+          </a:xfrm>
+          <a:prstGeom prst="rect">
+            <a:avLst/>
+          </a:prstGeom>
+          <a:solidFill>
+            <a:srgbClr val="D9534F"/>
+          </a:solidFill>
+          <a:ln>
+            <a:noFill/>
+          </a:ln>
+          <a:effectLst/>
+        </p:spPr>
+        <p:style>
+          <a:lnRef idx="1">
+            <a:schemeClr val="accent1"/>
+          </a:lnRef>
+          <a:fillRef idx="3">
+            <a:schemeClr val="accent1"/>
+          </a:fillRef>
+          <a:effectRef idx="2">
+            <a:schemeClr val="accent1"/>
+          </a:effectRef>
+          <a:fontRef idx="minor">
+            <a:schemeClr val="lt1"/>
+          </a:fontRef>
+        </p:style>
+        <p:txBody>
+          <a:bodyPr rtlCol="0" anchor="ctr"/>
+          <a:lstStyle/>
+          <a:p>
+            <a:pPr algn="ctr"/>
+          </a:p>
+        </p:txBody>
+      </p:sp>
+      <p:sp>
+        <p:nvSpPr>
+          <p:cNvPr id="11" name="TextBox 10"/>
           <p:cNvSpPr txBox="1"/>
           <p:nvPr/>
         </p:nvSpPr>
         <p:spPr>
           <a:xfrm>
-            <a:off x="868680" y="2697480"/>
+            <a:off x="868680" y="3310128"/>
             <a:ext cx="5956840" cy="688340"/>
           </a:xfrm>
           <a:prstGeom prst="rect">
@@ -17187,14 +18096,14 @@
       </p:sp>
       <p:sp>
         <p:nvSpPr>
-          <p:cNvPr id="5" name="TextBox 4"/>
+          <p:cNvPr id="12" name="TextBox 11"/>
           <p:cNvSpPr txBox="1"/>
           <p:nvPr/>
         </p:nvSpPr>
         <p:spPr>
           <a:xfrm>
-            <a:off x="868680" y="3614420"/>
-            <a:ext cx="5956840" cy="2603499"/>
+            <a:off x="868680" y="4190491"/>
+            <a:ext cx="5956840" cy="2027428"/>
           </a:xfrm>
           <a:prstGeom prst="rect">
             <a:avLst/>
@@ -17232,13 +18141,13 @@
       </p:sp>
       <p:sp>
         <p:nvSpPr>
-          <p:cNvPr id="6" name="TextBox 5"/>
+          <p:cNvPr id="13" name="TextBox 12"/>
           <p:cNvSpPr txBox="1"/>
           <p:nvPr/>
         </p:nvSpPr>
         <p:spPr>
           <a:xfrm>
-            <a:off x="7585057" y="1097280"/>
+            <a:off x="7585057" y="2788920"/>
             <a:ext cx="3829397" cy="274320"/>
           </a:xfrm>
           <a:prstGeom prst="rect">
@@ -17277,14 +18186,14 @@
       </p:sp>
       <p:sp>
         <p:nvSpPr>
-          <p:cNvPr id="7" name="TextBox 6"/>
+          <p:cNvPr id="14" name="TextBox 13"/>
           <p:cNvSpPr txBox="1"/>
           <p:nvPr/>
         </p:nvSpPr>
         <p:spPr>
           <a:xfrm>
-            <a:off x="7585057" y="1481328"/>
-            <a:ext cx="3829397" cy="4206240"/>
+            <a:off x="7585057" y="3154680"/>
+            <a:ext cx="3829397" cy="3063239"/>
           </a:xfrm>
           <a:prstGeom prst="rect">
             <a:avLst/>
@@ -17305,11 +18214,11 @@
                 <a:spcPts val="0"/>
               </a:spcBef>
               <a:spcAft>
-                <a:spcPts val="900"/>
-              </a:spcAft>
-            </a:pPr>
-            <a:r>
-              <a:rPr sz="1500" b="1">
+                <a:spcPts val="800"/>
+              </a:spcAft>
+            </a:pPr>
+            <a:r>
+              <a:rPr sz="1400" b="1">
                 <a:solidFill>
                   <a:srgbClr val="F3C6CF"/>
                 </a:solidFill>
@@ -17318,7 +18227,7 @@
               <a:t>01   </a:t>
             </a:r>
             <a:r>
-              <a:rPr sz="1500" b="0">
+              <a:rPr sz="1400" b="0">
                 <a:solidFill>
                   <a:srgbClr val="FFFFFF"/>
                 </a:solidFill>
@@ -17336,11 +18245,11 @@
                 <a:spcPts val="0"/>
               </a:spcBef>
               <a:spcAft>
-                <a:spcPts val="900"/>
-              </a:spcAft>
-            </a:pPr>
-            <a:r>
-              <a:rPr sz="1500" b="1">
+                <a:spcPts val="800"/>
+              </a:spcAft>
+            </a:pPr>
+            <a:r>
+              <a:rPr sz="1400" b="1">
                 <a:solidFill>
                   <a:srgbClr val="F3C6CF"/>
                 </a:solidFill>
@@ -17349,7 +18258,7 @@
               <a:t>02   </a:t>
             </a:r>
             <a:r>
-              <a:rPr sz="1500" b="0">
+              <a:rPr sz="1400" b="0">
                 <a:solidFill>
                   <a:srgbClr val="FFFFFF"/>
                 </a:solidFill>
@@ -17367,11 +18276,11 @@
                 <a:spcPts val="0"/>
               </a:spcBef>
               <a:spcAft>
-                <a:spcPts val="900"/>
-              </a:spcAft>
-            </a:pPr>
-            <a:r>
-              <a:rPr sz="1500" b="1">
+                <a:spcPts val="800"/>
+              </a:spcAft>
+            </a:pPr>
+            <a:r>
+              <a:rPr sz="1400" b="1">
                 <a:solidFill>
                   <a:srgbClr val="F3C6CF"/>
                 </a:solidFill>
@@ -17380,7 +18289,7 @@
               <a:t>03   </a:t>
             </a:r>
             <a:r>
-              <a:rPr sz="1500" b="0">
+              <a:rPr sz="1400" b="0">
                 <a:solidFill>
                   <a:srgbClr val="FFFFFF"/>
                 </a:solidFill>
@@ -17398,11 +18307,11 @@
                 <a:spcPts val="0"/>
               </a:spcBef>
               <a:spcAft>
-                <a:spcPts val="900"/>
-              </a:spcAft>
-            </a:pPr>
-            <a:r>
-              <a:rPr sz="1500" b="1">
+                <a:spcPts val="800"/>
+              </a:spcAft>
+            </a:pPr>
+            <a:r>
+              <a:rPr sz="1400" b="1">
                 <a:solidFill>
                   <a:srgbClr val="F3C6CF"/>
                 </a:solidFill>
@@ -17411,7 +18320,7 @@
               <a:t>04   </a:t>
             </a:r>
             <a:r>
-              <a:rPr sz="1500" b="0">
+              <a:rPr sz="1400" b="0">
                 <a:solidFill>
                   <a:srgbClr val="FFFFFF"/>
                 </a:solidFill>
@@ -21070,20 +21979,112 @@
       </p:sp>
       <p:sp>
         <p:nvSpPr>
-          <p:cNvPr id="3" name="Oval 2"/>
+          <p:cNvPr id="3" name="TextBox 2"/>
+          <p:cNvSpPr txBox="1"/>
+          <p:nvPr/>
+        </p:nvSpPr>
+        <p:spPr>
+          <a:xfrm>
+            <a:off x="5244870" y="137160"/>
+            <a:ext cx="6169584" cy="2514600"/>
+          </a:xfrm>
+          <a:prstGeom prst="rect">
+            <a:avLst/>
+          </a:prstGeom>
+          <a:noFill/>
+        </p:spPr>
+        <p:txBody>
+          <a:bodyPr wrap="square" lIns="0" rIns="0" tIns="0" bIns="0" anchor="t">
+            <a:spAutoFit/>
+          </a:bodyPr>
+          <a:lstStyle/>
+          <a:p>
+            <a:pPr algn="r">
+              <a:lnSpc>
+                <a:spcPct val="100000"/>
+              </a:lnSpc>
+              <a:spcBef>
+                <a:spcPts val="0"/>
+              </a:spcBef>
+              <a:spcAft>
+                <a:spcPts val="0"/>
+              </a:spcAft>
+            </a:pPr>
+            <a:r>
+              <a:rPr sz="16500" b="1" i="0">
+                <a:solidFill>
+                  <a:srgbClr val="FFFFFF">
+                    <a:alpha val="13000"/>
+                  </a:srgbClr>
+                </a:solidFill>
+                <a:latin typeface="Calibri"/>
+              </a:rPr>
+              <a:t>05</a:t>
+            </a:r>
+          </a:p>
+        </p:txBody>
+      </p:sp>
+      <p:sp>
+        <p:nvSpPr>
+          <p:cNvPr id="4" name="TextBox 3"/>
+          <p:cNvSpPr txBox="1"/>
+          <p:nvPr/>
+        </p:nvSpPr>
+        <p:spPr>
+          <a:xfrm>
+            <a:off x="868680" y="2743200"/>
+            <a:ext cx="5318607" cy="274320"/>
+          </a:xfrm>
+          <a:prstGeom prst="rect">
+            <a:avLst/>
+          </a:prstGeom>
+          <a:noFill/>
+        </p:spPr>
+        <p:txBody>
+          <a:bodyPr wrap="square" lIns="0" rIns="0" tIns="0" bIns="0" anchor="t">
+            <a:spAutoFit/>
+          </a:bodyPr>
+          <a:lstStyle/>
+          <a:p>
+            <a:pPr algn="l">
+              <a:lnSpc>
+                <a:spcPct val="120000"/>
+              </a:lnSpc>
+              <a:spcBef>
+                <a:spcPts val="0"/>
+              </a:spcBef>
+              <a:spcAft>
+                <a:spcPts val="0"/>
+              </a:spcAft>
+            </a:pPr>
+            <a:r>
+              <a:rPr sz="1200" b="1" i="0">
+                <a:solidFill>
+                  <a:srgbClr val="F3C6CF"/>
+                </a:solidFill>
+                <a:latin typeface="Calibri"/>
+              </a:rPr>
+              <a:t>SECTION 05</a:t>
+            </a:r>
+          </a:p>
+        </p:txBody>
+      </p:sp>
+      <p:sp>
+        <p:nvSpPr>
+          <p:cNvPr id="5" name="Rectangle 4"/>
           <p:cNvSpPr/>
           <p:nvPr/>
         </p:nvSpPr>
         <p:spPr>
           <a:xfrm>
-            <a:off x="868680" y="1051560"/>
-            <a:ext cx="1325880" cy="1325880"/>
-          </a:xfrm>
-          <a:prstGeom prst="ellipse">
+            <a:off x="868680" y="3127248"/>
+            <a:ext cx="289560" cy="54864"/>
+          </a:xfrm>
+          <a:prstGeom prst="rect">
             <a:avLst/>
           </a:prstGeom>
           <a:solidFill>
-            <a:srgbClr val="A51C30"/>
+            <a:srgbClr val="00B3A4"/>
           </a:solidFill>
           <a:ln>
             <a:noFill/>
@@ -21105,31 +22106,242 @@
           </a:fontRef>
         </p:style>
         <p:txBody>
-          <a:bodyPr rtlCol="0" anchor="ctr" lIns="0" rIns="0" tIns="0" bIns="0"/>
+          <a:bodyPr rtlCol="0" anchor="ctr"/>
           <a:lstStyle/>
           <a:p>
             <a:pPr algn="ctr"/>
-            <a:r>
-              <a:rPr sz="4800" b="1">
-                <a:solidFill>
-                  <a:srgbClr val="FFFFFF"/>
-                </a:solidFill>
-                <a:latin typeface="Calibri"/>
-              </a:rPr>
-              <a:t>5</a:t>
-            </a:r>
-          </a:p>
-        </p:txBody>
-      </p:sp>
-      <p:sp>
-        <p:nvSpPr>
-          <p:cNvPr id="4" name="TextBox 3"/>
+          </a:p>
+        </p:txBody>
+      </p:sp>
+      <p:sp>
+        <p:nvSpPr>
+          <p:cNvPr id="6" name="Rectangle 5"/>
+          <p:cNvSpPr/>
+          <p:nvPr/>
+        </p:nvSpPr>
+        <p:spPr>
+          <a:xfrm>
+            <a:off x="1158240" y="3127248"/>
+            <a:ext cx="289560" cy="54864"/>
+          </a:xfrm>
+          <a:prstGeom prst="rect">
+            <a:avLst/>
+          </a:prstGeom>
+          <a:solidFill>
+            <a:srgbClr val="2FB673"/>
+          </a:solidFill>
+          <a:ln>
+            <a:noFill/>
+          </a:ln>
+          <a:effectLst/>
+        </p:spPr>
+        <p:style>
+          <a:lnRef idx="1">
+            <a:schemeClr val="accent1"/>
+          </a:lnRef>
+          <a:fillRef idx="3">
+            <a:schemeClr val="accent1"/>
+          </a:fillRef>
+          <a:effectRef idx="2">
+            <a:schemeClr val="accent1"/>
+          </a:effectRef>
+          <a:fontRef idx="minor">
+            <a:schemeClr val="lt1"/>
+          </a:fontRef>
+        </p:style>
+        <p:txBody>
+          <a:bodyPr rtlCol="0" anchor="ctr"/>
+          <a:lstStyle/>
+          <a:p>
+            <a:pPr algn="ctr"/>
+          </a:p>
+        </p:txBody>
+      </p:sp>
+      <p:sp>
+        <p:nvSpPr>
+          <p:cNvPr id="7" name="Rectangle 6"/>
+          <p:cNvSpPr/>
+          <p:nvPr/>
+        </p:nvSpPr>
+        <p:spPr>
+          <a:xfrm>
+            <a:off x="1447800" y="3127248"/>
+            <a:ext cx="289560" cy="54864"/>
+          </a:xfrm>
+          <a:prstGeom prst="rect">
+            <a:avLst/>
+          </a:prstGeom>
+          <a:solidFill>
+            <a:srgbClr val="8CBF3F"/>
+          </a:solidFill>
+          <a:ln>
+            <a:noFill/>
+          </a:ln>
+          <a:effectLst/>
+        </p:spPr>
+        <p:style>
+          <a:lnRef idx="1">
+            <a:schemeClr val="accent1"/>
+          </a:lnRef>
+          <a:fillRef idx="3">
+            <a:schemeClr val="accent1"/>
+          </a:fillRef>
+          <a:effectRef idx="2">
+            <a:schemeClr val="accent1"/>
+          </a:effectRef>
+          <a:fontRef idx="minor">
+            <a:schemeClr val="lt1"/>
+          </a:fontRef>
+        </p:style>
+        <p:txBody>
+          <a:bodyPr rtlCol="0" anchor="ctr"/>
+          <a:lstStyle/>
+          <a:p>
+            <a:pPr algn="ctr"/>
+          </a:p>
+        </p:txBody>
+      </p:sp>
+      <p:sp>
+        <p:nvSpPr>
+          <p:cNvPr id="8" name="Rectangle 7"/>
+          <p:cNvSpPr/>
+          <p:nvPr/>
+        </p:nvSpPr>
+        <p:spPr>
+          <a:xfrm>
+            <a:off x="1737360" y="3127248"/>
+            <a:ext cx="289560" cy="54864"/>
+          </a:xfrm>
+          <a:prstGeom prst="rect">
+            <a:avLst/>
+          </a:prstGeom>
+          <a:solidFill>
+            <a:srgbClr val="E8B33A"/>
+          </a:solidFill>
+          <a:ln>
+            <a:noFill/>
+          </a:ln>
+          <a:effectLst/>
+        </p:spPr>
+        <p:style>
+          <a:lnRef idx="1">
+            <a:schemeClr val="accent1"/>
+          </a:lnRef>
+          <a:fillRef idx="3">
+            <a:schemeClr val="accent1"/>
+          </a:fillRef>
+          <a:effectRef idx="2">
+            <a:schemeClr val="accent1"/>
+          </a:effectRef>
+          <a:fontRef idx="minor">
+            <a:schemeClr val="lt1"/>
+          </a:fontRef>
+        </p:style>
+        <p:txBody>
+          <a:bodyPr rtlCol="0" anchor="ctr"/>
+          <a:lstStyle/>
+          <a:p>
+            <a:pPr algn="ctr"/>
+          </a:p>
+        </p:txBody>
+      </p:sp>
+      <p:sp>
+        <p:nvSpPr>
+          <p:cNvPr id="9" name="Rectangle 8"/>
+          <p:cNvSpPr/>
+          <p:nvPr/>
+        </p:nvSpPr>
+        <p:spPr>
+          <a:xfrm>
+            <a:off x="2026920" y="3127248"/>
+            <a:ext cx="289560" cy="54864"/>
+          </a:xfrm>
+          <a:prstGeom prst="rect">
+            <a:avLst/>
+          </a:prstGeom>
+          <a:solidFill>
+            <a:srgbClr val="E8823A"/>
+          </a:solidFill>
+          <a:ln>
+            <a:noFill/>
+          </a:ln>
+          <a:effectLst/>
+        </p:spPr>
+        <p:style>
+          <a:lnRef idx="1">
+            <a:schemeClr val="accent1"/>
+          </a:lnRef>
+          <a:fillRef idx="3">
+            <a:schemeClr val="accent1"/>
+          </a:fillRef>
+          <a:effectRef idx="2">
+            <a:schemeClr val="accent1"/>
+          </a:effectRef>
+          <a:fontRef idx="minor">
+            <a:schemeClr val="lt1"/>
+          </a:fontRef>
+        </p:style>
+        <p:txBody>
+          <a:bodyPr rtlCol="0" anchor="ctr"/>
+          <a:lstStyle/>
+          <a:p>
+            <a:pPr algn="ctr"/>
+          </a:p>
+        </p:txBody>
+      </p:sp>
+      <p:sp>
+        <p:nvSpPr>
+          <p:cNvPr id="10" name="Rectangle 9"/>
+          <p:cNvSpPr/>
+          <p:nvPr/>
+        </p:nvSpPr>
+        <p:spPr>
+          <a:xfrm>
+            <a:off x="2316480" y="3127248"/>
+            <a:ext cx="289560" cy="54864"/>
+          </a:xfrm>
+          <a:prstGeom prst="rect">
+            <a:avLst/>
+          </a:prstGeom>
+          <a:solidFill>
+            <a:srgbClr val="D9534F"/>
+          </a:solidFill>
+          <a:ln>
+            <a:noFill/>
+          </a:ln>
+          <a:effectLst/>
+        </p:spPr>
+        <p:style>
+          <a:lnRef idx="1">
+            <a:schemeClr val="accent1"/>
+          </a:lnRef>
+          <a:fillRef idx="3">
+            <a:schemeClr val="accent1"/>
+          </a:fillRef>
+          <a:effectRef idx="2">
+            <a:schemeClr val="accent1"/>
+          </a:effectRef>
+          <a:fontRef idx="minor">
+            <a:schemeClr val="lt1"/>
+          </a:fontRef>
+        </p:style>
+        <p:txBody>
+          <a:bodyPr rtlCol="0" anchor="ctr"/>
+          <a:lstStyle/>
+          <a:p>
+            <a:pPr algn="ctr"/>
+          </a:p>
+        </p:txBody>
+      </p:sp>
+      <p:sp>
+        <p:nvSpPr>
+          <p:cNvPr id="11" name="TextBox 10"/>
           <p:cNvSpPr txBox="1"/>
           <p:nvPr/>
         </p:nvSpPr>
         <p:spPr>
           <a:xfrm>
-            <a:off x="868680" y="2697480"/>
+            <a:off x="868680" y="3310128"/>
             <a:ext cx="5956840" cy="688340"/>
           </a:xfrm>
           <a:prstGeom prst="rect">
@@ -21168,14 +22380,14 @@
       </p:sp>
       <p:sp>
         <p:nvSpPr>
-          <p:cNvPr id="5" name="TextBox 4"/>
+          <p:cNvPr id="12" name="TextBox 11"/>
           <p:cNvSpPr txBox="1"/>
           <p:nvPr/>
         </p:nvSpPr>
         <p:spPr>
           <a:xfrm>
-            <a:off x="868680" y="3614420"/>
-            <a:ext cx="5956840" cy="2603499"/>
+            <a:off x="868680" y="4190491"/>
+            <a:ext cx="5956840" cy="2027428"/>
           </a:xfrm>
           <a:prstGeom prst="rect">
             <a:avLst/>
@@ -21213,13 +22425,13 @@
       </p:sp>
       <p:sp>
         <p:nvSpPr>
-          <p:cNvPr id="6" name="TextBox 5"/>
+          <p:cNvPr id="13" name="TextBox 12"/>
           <p:cNvSpPr txBox="1"/>
           <p:nvPr/>
         </p:nvSpPr>
         <p:spPr>
           <a:xfrm>
-            <a:off x="7585057" y="1097280"/>
+            <a:off x="7585057" y="2788920"/>
             <a:ext cx="3829397" cy="274320"/>
           </a:xfrm>
           <a:prstGeom prst="rect">
@@ -21258,14 +22470,14 @@
       </p:sp>
       <p:sp>
         <p:nvSpPr>
-          <p:cNvPr id="7" name="TextBox 6"/>
+          <p:cNvPr id="14" name="TextBox 13"/>
           <p:cNvSpPr txBox="1"/>
           <p:nvPr/>
         </p:nvSpPr>
         <p:spPr>
           <a:xfrm>
-            <a:off x="7585057" y="1481328"/>
-            <a:ext cx="3829397" cy="4206240"/>
+            <a:off x="7585057" y="3154680"/>
+            <a:ext cx="3829397" cy="3063239"/>
           </a:xfrm>
           <a:prstGeom prst="rect">
             <a:avLst/>
@@ -21286,11 +22498,11 @@
                 <a:spcPts val="0"/>
               </a:spcBef>
               <a:spcAft>
-                <a:spcPts val="900"/>
-              </a:spcAft>
-            </a:pPr>
-            <a:r>
-              <a:rPr sz="1500" b="1">
+                <a:spcPts val="800"/>
+              </a:spcAft>
+            </a:pPr>
+            <a:r>
+              <a:rPr sz="1400" b="1">
                 <a:solidFill>
                   <a:srgbClr val="F3C6CF"/>
                 </a:solidFill>
@@ -21299,7 +22511,7 @@
               <a:t>01   </a:t>
             </a:r>
             <a:r>
-              <a:rPr sz="1500" b="0">
+              <a:rPr sz="1400" b="0">
                 <a:solidFill>
                   <a:srgbClr val="FFFFFF"/>
                 </a:solidFill>
@@ -21317,11 +22529,11 @@
                 <a:spcPts val="0"/>
               </a:spcBef>
               <a:spcAft>
-                <a:spcPts val="900"/>
-              </a:spcAft>
-            </a:pPr>
-            <a:r>
-              <a:rPr sz="1500" b="1">
+                <a:spcPts val="800"/>
+              </a:spcAft>
+            </a:pPr>
+            <a:r>
+              <a:rPr sz="1400" b="1">
                 <a:solidFill>
                   <a:srgbClr val="F3C6CF"/>
                 </a:solidFill>
@@ -21330,7 +22542,7 @@
               <a:t>02   </a:t>
             </a:r>
             <a:r>
-              <a:rPr sz="1500" b="0">
+              <a:rPr sz="1400" b="0">
                 <a:solidFill>
                   <a:srgbClr val="FFFFFF"/>
                 </a:solidFill>
@@ -21348,11 +22560,11 @@
                 <a:spcPts val="0"/>
               </a:spcBef>
               <a:spcAft>
-                <a:spcPts val="900"/>
-              </a:spcAft>
-            </a:pPr>
-            <a:r>
-              <a:rPr sz="1500" b="1">
+                <a:spcPts val="800"/>
+              </a:spcAft>
+            </a:pPr>
+            <a:r>
+              <a:rPr sz="1400" b="1">
                 <a:solidFill>
                   <a:srgbClr val="F3C6CF"/>
                 </a:solidFill>
@@ -21361,7 +22573,7 @@
               <a:t>03   </a:t>
             </a:r>
             <a:r>
-              <a:rPr sz="1500" b="0">
+              <a:rPr sz="1400" b="0">
                 <a:solidFill>
                   <a:srgbClr val="FFFFFF"/>
                 </a:solidFill>
@@ -21379,11 +22591,11 @@
                 <a:spcPts val="0"/>
               </a:spcBef>
               <a:spcAft>
-                <a:spcPts val="900"/>
-              </a:spcAft>
-            </a:pPr>
-            <a:r>
-              <a:rPr sz="1500" b="1">
+                <a:spcPts val="800"/>
+              </a:spcAft>
+            </a:pPr>
+            <a:r>
+              <a:rPr sz="1400" b="1">
                 <a:solidFill>
                   <a:srgbClr val="F3C6CF"/>
                 </a:solidFill>
@@ -21392,7 +22604,7 @@
               <a:t>04   </a:t>
             </a:r>
             <a:r>
-              <a:rPr sz="1500" b="0">
+              <a:rPr sz="1400" b="0">
                 <a:solidFill>
                   <a:srgbClr val="FFFFFF"/>
                 </a:solidFill>
@@ -21410,11 +22622,11 @@
                 <a:spcPts val="0"/>
               </a:spcBef>
               <a:spcAft>
-                <a:spcPts val="900"/>
-              </a:spcAft>
-            </a:pPr>
-            <a:r>
-              <a:rPr sz="1500" b="1">
+                <a:spcPts val="800"/>
+              </a:spcAft>
+            </a:pPr>
+            <a:r>
+              <a:rPr sz="1400" b="1">
                 <a:solidFill>
                   <a:srgbClr val="F3C6CF"/>
                 </a:solidFill>
@@ -21423,7 +22635,7 @@
               <a:t>05   </a:t>
             </a:r>
             <a:r>
-              <a:rPr sz="1500" b="0">
+              <a:rPr sz="1400" b="0">
                 <a:solidFill>
                   <a:srgbClr val="FFFFFF"/>
                 </a:solidFill>
@@ -25453,20 +26665,112 @@
       </p:sp>
       <p:sp>
         <p:nvSpPr>
-          <p:cNvPr id="3" name="Oval 2"/>
+          <p:cNvPr id="3" name="TextBox 2"/>
+          <p:cNvSpPr txBox="1"/>
+          <p:nvPr/>
+        </p:nvSpPr>
+        <p:spPr>
+          <a:xfrm>
+            <a:off x="5244870" y="137160"/>
+            <a:ext cx="6169584" cy="2514600"/>
+          </a:xfrm>
+          <a:prstGeom prst="rect">
+            <a:avLst/>
+          </a:prstGeom>
+          <a:noFill/>
+        </p:spPr>
+        <p:txBody>
+          <a:bodyPr wrap="square" lIns="0" rIns="0" tIns="0" bIns="0" anchor="t">
+            <a:spAutoFit/>
+          </a:bodyPr>
+          <a:lstStyle/>
+          <a:p>
+            <a:pPr algn="r">
+              <a:lnSpc>
+                <a:spcPct val="100000"/>
+              </a:lnSpc>
+              <a:spcBef>
+                <a:spcPts val="0"/>
+              </a:spcBef>
+              <a:spcAft>
+                <a:spcPts val="0"/>
+              </a:spcAft>
+            </a:pPr>
+            <a:r>
+              <a:rPr sz="16500" b="1" i="0">
+                <a:solidFill>
+                  <a:srgbClr val="FFFFFF">
+                    <a:alpha val="13000"/>
+                  </a:srgbClr>
+                </a:solidFill>
+                <a:latin typeface="Calibri"/>
+              </a:rPr>
+              <a:t>06</a:t>
+            </a:r>
+          </a:p>
+        </p:txBody>
+      </p:sp>
+      <p:sp>
+        <p:nvSpPr>
+          <p:cNvPr id="4" name="TextBox 3"/>
+          <p:cNvSpPr txBox="1"/>
+          <p:nvPr/>
+        </p:nvSpPr>
+        <p:spPr>
+          <a:xfrm>
+            <a:off x="868680" y="2743200"/>
+            <a:ext cx="5318607" cy="274320"/>
+          </a:xfrm>
+          <a:prstGeom prst="rect">
+            <a:avLst/>
+          </a:prstGeom>
+          <a:noFill/>
+        </p:spPr>
+        <p:txBody>
+          <a:bodyPr wrap="square" lIns="0" rIns="0" tIns="0" bIns="0" anchor="t">
+            <a:spAutoFit/>
+          </a:bodyPr>
+          <a:lstStyle/>
+          <a:p>
+            <a:pPr algn="l">
+              <a:lnSpc>
+                <a:spcPct val="120000"/>
+              </a:lnSpc>
+              <a:spcBef>
+                <a:spcPts val="0"/>
+              </a:spcBef>
+              <a:spcAft>
+                <a:spcPts val="0"/>
+              </a:spcAft>
+            </a:pPr>
+            <a:r>
+              <a:rPr sz="1200" b="1" i="0">
+                <a:solidFill>
+                  <a:srgbClr val="F3C6CF"/>
+                </a:solidFill>
+                <a:latin typeface="Calibri"/>
+              </a:rPr>
+              <a:t>SECTION 06</a:t>
+            </a:r>
+          </a:p>
+        </p:txBody>
+      </p:sp>
+      <p:sp>
+        <p:nvSpPr>
+          <p:cNvPr id="5" name="Rectangle 4"/>
           <p:cNvSpPr/>
           <p:nvPr/>
         </p:nvSpPr>
         <p:spPr>
           <a:xfrm>
-            <a:off x="868680" y="1051560"/>
-            <a:ext cx="1325880" cy="1325880"/>
-          </a:xfrm>
-          <a:prstGeom prst="ellipse">
+            <a:off x="868680" y="3127248"/>
+            <a:ext cx="289560" cy="54864"/>
+          </a:xfrm>
+          <a:prstGeom prst="rect">
             <a:avLst/>
           </a:prstGeom>
           <a:solidFill>
-            <a:srgbClr val="A51C30"/>
+            <a:srgbClr val="00B3A4"/>
           </a:solidFill>
           <a:ln>
             <a:noFill/>
@@ -25488,31 +26792,242 @@
           </a:fontRef>
         </p:style>
         <p:txBody>
-          <a:bodyPr rtlCol="0" anchor="ctr" lIns="0" rIns="0" tIns="0" bIns="0"/>
+          <a:bodyPr rtlCol="0" anchor="ctr"/>
           <a:lstStyle/>
           <a:p>
             <a:pPr algn="ctr"/>
-            <a:r>
-              <a:rPr sz="4800" b="1">
-                <a:solidFill>
-                  <a:srgbClr val="FFFFFF"/>
-                </a:solidFill>
-                <a:latin typeface="Calibri"/>
-              </a:rPr>
-              <a:t>6</a:t>
-            </a:r>
-          </a:p>
-        </p:txBody>
-      </p:sp>
-      <p:sp>
-        <p:nvSpPr>
-          <p:cNvPr id="4" name="TextBox 3"/>
+          </a:p>
+        </p:txBody>
+      </p:sp>
+      <p:sp>
+        <p:nvSpPr>
+          <p:cNvPr id="6" name="Rectangle 5"/>
+          <p:cNvSpPr/>
+          <p:nvPr/>
+        </p:nvSpPr>
+        <p:spPr>
+          <a:xfrm>
+            <a:off x="1158240" y="3127248"/>
+            <a:ext cx="289560" cy="54864"/>
+          </a:xfrm>
+          <a:prstGeom prst="rect">
+            <a:avLst/>
+          </a:prstGeom>
+          <a:solidFill>
+            <a:srgbClr val="2FB673"/>
+          </a:solidFill>
+          <a:ln>
+            <a:noFill/>
+          </a:ln>
+          <a:effectLst/>
+        </p:spPr>
+        <p:style>
+          <a:lnRef idx="1">
+            <a:schemeClr val="accent1"/>
+          </a:lnRef>
+          <a:fillRef idx="3">
+            <a:schemeClr val="accent1"/>
+          </a:fillRef>
+          <a:effectRef idx="2">
+            <a:schemeClr val="accent1"/>
+          </a:effectRef>
+          <a:fontRef idx="minor">
+            <a:schemeClr val="lt1"/>
+          </a:fontRef>
+        </p:style>
+        <p:txBody>
+          <a:bodyPr rtlCol="0" anchor="ctr"/>
+          <a:lstStyle/>
+          <a:p>
+            <a:pPr algn="ctr"/>
+          </a:p>
+        </p:txBody>
+      </p:sp>
+      <p:sp>
+        <p:nvSpPr>
+          <p:cNvPr id="7" name="Rectangle 6"/>
+          <p:cNvSpPr/>
+          <p:nvPr/>
+        </p:nvSpPr>
+        <p:spPr>
+          <a:xfrm>
+            <a:off x="1447800" y="3127248"/>
+            <a:ext cx="289560" cy="54864"/>
+          </a:xfrm>
+          <a:prstGeom prst="rect">
+            <a:avLst/>
+          </a:prstGeom>
+          <a:solidFill>
+            <a:srgbClr val="8CBF3F"/>
+          </a:solidFill>
+          <a:ln>
+            <a:noFill/>
+          </a:ln>
+          <a:effectLst/>
+        </p:spPr>
+        <p:style>
+          <a:lnRef idx="1">
+            <a:schemeClr val="accent1"/>
+          </a:lnRef>
+          <a:fillRef idx="3">
+            <a:schemeClr val="accent1"/>
+          </a:fillRef>
+          <a:effectRef idx="2">
+            <a:schemeClr val="accent1"/>
+          </a:effectRef>
+          <a:fontRef idx="minor">
+            <a:schemeClr val="lt1"/>
+          </a:fontRef>
+        </p:style>
+        <p:txBody>
+          <a:bodyPr rtlCol="0" anchor="ctr"/>
+          <a:lstStyle/>
+          <a:p>
+            <a:pPr algn="ctr"/>
+          </a:p>
+        </p:txBody>
+      </p:sp>
+      <p:sp>
+        <p:nvSpPr>
+          <p:cNvPr id="8" name="Rectangle 7"/>
+          <p:cNvSpPr/>
+          <p:nvPr/>
+        </p:nvSpPr>
+        <p:spPr>
+          <a:xfrm>
+            <a:off x="1737360" y="3127248"/>
+            <a:ext cx="289560" cy="54864"/>
+          </a:xfrm>
+          <a:prstGeom prst="rect">
+            <a:avLst/>
+          </a:prstGeom>
+          <a:solidFill>
+            <a:srgbClr val="E8B33A"/>
+          </a:solidFill>
+          <a:ln>
+            <a:noFill/>
+          </a:ln>
+          <a:effectLst/>
+        </p:spPr>
+        <p:style>
+          <a:lnRef idx="1">
+            <a:schemeClr val="accent1"/>
+          </a:lnRef>
+          <a:fillRef idx="3">
+            <a:schemeClr val="accent1"/>
+          </a:fillRef>
+          <a:effectRef idx="2">
+            <a:schemeClr val="accent1"/>
+          </a:effectRef>
+          <a:fontRef idx="minor">
+            <a:schemeClr val="lt1"/>
+          </a:fontRef>
+        </p:style>
+        <p:txBody>
+          <a:bodyPr rtlCol="0" anchor="ctr"/>
+          <a:lstStyle/>
+          <a:p>
+            <a:pPr algn="ctr"/>
+          </a:p>
+        </p:txBody>
+      </p:sp>
+      <p:sp>
+        <p:nvSpPr>
+          <p:cNvPr id="9" name="Rectangle 8"/>
+          <p:cNvSpPr/>
+          <p:nvPr/>
+        </p:nvSpPr>
+        <p:spPr>
+          <a:xfrm>
+            <a:off x="2026920" y="3127248"/>
+            <a:ext cx="289560" cy="54864"/>
+          </a:xfrm>
+          <a:prstGeom prst="rect">
+            <a:avLst/>
+          </a:prstGeom>
+          <a:solidFill>
+            <a:srgbClr val="E8823A"/>
+          </a:solidFill>
+          <a:ln>
+            <a:noFill/>
+          </a:ln>
+          <a:effectLst/>
+        </p:spPr>
+        <p:style>
+          <a:lnRef idx="1">
+            <a:schemeClr val="accent1"/>
+          </a:lnRef>
+          <a:fillRef idx="3">
+            <a:schemeClr val="accent1"/>
+          </a:fillRef>
+          <a:effectRef idx="2">
+            <a:schemeClr val="accent1"/>
+          </a:effectRef>
+          <a:fontRef idx="minor">
+            <a:schemeClr val="lt1"/>
+          </a:fontRef>
+        </p:style>
+        <p:txBody>
+          <a:bodyPr rtlCol="0" anchor="ctr"/>
+          <a:lstStyle/>
+          <a:p>
+            <a:pPr algn="ctr"/>
+          </a:p>
+        </p:txBody>
+      </p:sp>
+      <p:sp>
+        <p:nvSpPr>
+          <p:cNvPr id="10" name="Rectangle 9"/>
+          <p:cNvSpPr/>
+          <p:nvPr/>
+        </p:nvSpPr>
+        <p:spPr>
+          <a:xfrm>
+            <a:off x="2316480" y="3127248"/>
+            <a:ext cx="289560" cy="54864"/>
+          </a:xfrm>
+          <a:prstGeom prst="rect">
+            <a:avLst/>
+          </a:prstGeom>
+          <a:solidFill>
+            <a:srgbClr val="D9534F"/>
+          </a:solidFill>
+          <a:ln>
+            <a:noFill/>
+          </a:ln>
+          <a:effectLst/>
+        </p:spPr>
+        <p:style>
+          <a:lnRef idx="1">
+            <a:schemeClr val="accent1"/>
+          </a:lnRef>
+          <a:fillRef idx="3">
+            <a:schemeClr val="accent1"/>
+          </a:fillRef>
+          <a:effectRef idx="2">
+            <a:schemeClr val="accent1"/>
+          </a:effectRef>
+          <a:fontRef idx="minor">
+            <a:schemeClr val="lt1"/>
+          </a:fontRef>
+        </p:style>
+        <p:txBody>
+          <a:bodyPr rtlCol="0" anchor="ctr"/>
+          <a:lstStyle/>
+          <a:p>
+            <a:pPr algn="ctr"/>
+          </a:p>
+        </p:txBody>
+      </p:sp>
+      <p:sp>
+        <p:nvSpPr>
+          <p:cNvPr id="11" name="TextBox 10"/>
           <p:cNvSpPr txBox="1"/>
           <p:nvPr/>
         </p:nvSpPr>
         <p:spPr>
           <a:xfrm>
-            <a:off x="868680" y="2697480"/>
+            <a:off x="868680" y="3310128"/>
             <a:ext cx="5956840" cy="688340"/>
           </a:xfrm>
           <a:prstGeom prst="rect">
@@ -25551,14 +27066,14 @@
       </p:sp>
       <p:sp>
         <p:nvSpPr>
-          <p:cNvPr id="5" name="TextBox 4"/>
+          <p:cNvPr id="12" name="TextBox 11"/>
           <p:cNvSpPr txBox="1"/>
           <p:nvPr/>
         </p:nvSpPr>
         <p:spPr>
           <a:xfrm>
-            <a:off x="868680" y="3614420"/>
-            <a:ext cx="5956840" cy="2603499"/>
+            <a:off x="868680" y="4190491"/>
+            <a:ext cx="5956840" cy="2027428"/>
           </a:xfrm>
           <a:prstGeom prst="rect">
             <a:avLst/>
@@ -25596,13 +27111,13 @@
       </p:sp>
       <p:sp>
         <p:nvSpPr>
-          <p:cNvPr id="6" name="TextBox 5"/>
+          <p:cNvPr id="13" name="TextBox 12"/>
           <p:cNvSpPr txBox="1"/>
           <p:nvPr/>
         </p:nvSpPr>
         <p:spPr>
           <a:xfrm>
-            <a:off x="7585057" y="1097280"/>
+            <a:off x="7585057" y="2788920"/>
             <a:ext cx="3829397" cy="274320"/>
           </a:xfrm>
           <a:prstGeom prst="rect">
@@ -25641,14 +27156,14 @@
       </p:sp>
       <p:sp>
         <p:nvSpPr>
-          <p:cNvPr id="7" name="TextBox 6"/>
+          <p:cNvPr id="14" name="TextBox 13"/>
           <p:cNvSpPr txBox="1"/>
           <p:nvPr/>
         </p:nvSpPr>
         <p:spPr>
           <a:xfrm>
-            <a:off x="7585057" y="1481328"/>
-            <a:ext cx="3829397" cy="4206240"/>
+            <a:off x="7585057" y="3154680"/>
+            <a:ext cx="3829397" cy="3063239"/>
           </a:xfrm>
           <a:prstGeom prst="rect">
             <a:avLst/>
@@ -25669,11 +27184,11 @@
                 <a:spcPts val="0"/>
               </a:spcBef>
               <a:spcAft>
-                <a:spcPts val="900"/>
-              </a:spcAft>
-            </a:pPr>
-            <a:r>
-              <a:rPr sz="1500" b="1">
+                <a:spcPts val="800"/>
+              </a:spcAft>
+            </a:pPr>
+            <a:r>
+              <a:rPr sz="1400" b="1">
                 <a:solidFill>
                   <a:srgbClr val="F3C6CF"/>
                 </a:solidFill>
@@ -25682,7 +27197,7 @@
               <a:t>01   </a:t>
             </a:r>
             <a:r>
-              <a:rPr sz="1500" b="0">
+              <a:rPr sz="1400" b="0">
                 <a:solidFill>
                   <a:srgbClr val="FFFFFF"/>
                 </a:solidFill>
@@ -25700,11 +27215,11 @@
                 <a:spcPts val="0"/>
               </a:spcBef>
               <a:spcAft>
-                <a:spcPts val="900"/>
-              </a:spcAft>
-            </a:pPr>
-            <a:r>
-              <a:rPr sz="1500" b="1">
+                <a:spcPts val="800"/>
+              </a:spcAft>
+            </a:pPr>
+            <a:r>
+              <a:rPr sz="1400" b="1">
                 <a:solidFill>
                   <a:srgbClr val="F3C6CF"/>
                 </a:solidFill>
@@ -25713,7 +27228,7 @@
               <a:t>02   </a:t>
             </a:r>
             <a:r>
-              <a:rPr sz="1500" b="0">
+              <a:rPr sz="1400" b="0">
                 <a:solidFill>
                   <a:srgbClr val="FFFFFF"/>
                 </a:solidFill>
@@ -25731,11 +27246,11 @@
                 <a:spcPts val="0"/>
               </a:spcBef>
               <a:spcAft>
-                <a:spcPts val="900"/>
-              </a:spcAft>
-            </a:pPr>
-            <a:r>
-              <a:rPr sz="1500" b="1">
+                <a:spcPts val="800"/>
+              </a:spcAft>
+            </a:pPr>
+            <a:r>
+              <a:rPr sz="1400" b="1">
                 <a:solidFill>
                   <a:srgbClr val="F3C6CF"/>
                 </a:solidFill>
@@ -25744,7 +27259,7 @@
               <a:t>03   </a:t>
             </a:r>
             <a:r>
-              <a:rPr sz="1500" b="0">
+              <a:rPr sz="1400" b="0">
                 <a:solidFill>
                   <a:srgbClr val="FFFFFF"/>
                 </a:solidFill>
@@ -25762,11 +27277,11 @@
                 <a:spcPts val="0"/>
               </a:spcBef>
               <a:spcAft>
-                <a:spcPts val="900"/>
-              </a:spcAft>
-            </a:pPr>
-            <a:r>
-              <a:rPr sz="1500" b="1">
+                <a:spcPts val="800"/>
+              </a:spcAft>
+            </a:pPr>
+            <a:r>
+              <a:rPr sz="1400" b="1">
                 <a:solidFill>
                   <a:srgbClr val="F3C6CF"/>
                 </a:solidFill>
@@ -25775,7 +27290,7 @@
               <a:t>04   </a:t>
             </a:r>
             <a:r>
-              <a:rPr sz="1500" b="0">
+              <a:rPr sz="1400" b="0">
                 <a:solidFill>
                   <a:srgbClr val="FFFFFF"/>
                 </a:solidFill>
@@ -27255,20 +28770,112 @@
       </p:sp>
       <p:sp>
         <p:nvSpPr>
-          <p:cNvPr id="3" name="Oval 2"/>
+          <p:cNvPr id="3" name="TextBox 2"/>
+          <p:cNvSpPr txBox="1"/>
+          <p:nvPr/>
+        </p:nvSpPr>
+        <p:spPr>
+          <a:xfrm>
+            <a:off x="5244870" y="137160"/>
+            <a:ext cx="6169584" cy="2514600"/>
+          </a:xfrm>
+          <a:prstGeom prst="rect">
+            <a:avLst/>
+          </a:prstGeom>
+          <a:noFill/>
+        </p:spPr>
+        <p:txBody>
+          <a:bodyPr wrap="square" lIns="0" rIns="0" tIns="0" bIns="0" anchor="t">
+            <a:spAutoFit/>
+          </a:bodyPr>
+          <a:lstStyle/>
+          <a:p>
+            <a:pPr algn="r">
+              <a:lnSpc>
+                <a:spcPct val="100000"/>
+              </a:lnSpc>
+              <a:spcBef>
+                <a:spcPts val="0"/>
+              </a:spcBef>
+              <a:spcAft>
+                <a:spcPts val="0"/>
+              </a:spcAft>
+            </a:pPr>
+            <a:r>
+              <a:rPr sz="16500" b="1" i="0">
+                <a:solidFill>
+                  <a:srgbClr val="FFFFFF">
+                    <a:alpha val="13000"/>
+                  </a:srgbClr>
+                </a:solidFill>
+                <a:latin typeface="Calibri"/>
+              </a:rPr>
+              <a:t>07</a:t>
+            </a:r>
+          </a:p>
+        </p:txBody>
+      </p:sp>
+      <p:sp>
+        <p:nvSpPr>
+          <p:cNvPr id="4" name="TextBox 3"/>
+          <p:cNvSpPr txBox="1"/>
+          <p:nvPr/>
+        </p:nvSpPr>
+        <p:spPr>
+          <a:xfrm>
+            <a:off x="868680" y="2743200"/>
+            <a:ext cx="5318607" cy="274320"/>
+          </a:xfrm>
+          <a:prstGeom prst="rect">
+            <a:avLst/>
+          </a:prstGeom>
+          <a:noFill/>
+        </p:spPr>
+        <p:txBody>
+          <a:bodyPr wrap="square" lIns="0" rIns="0" tIns="0" bIns="0" anchor="t">
+            <a:spAutoFit/>
+          </a:bodyPr>
+          <a:lstStyle/>
+          <a:p>
+            <a:pPr algn="l">
+              <a:lnSpc>
+                <a:spcPct val="120000"/>
+              </a:lnSpc>
+              <a:spcBef>
+                <a:spcPts val="0"/>
+              </a:spcBef>
+              <a:spcAft>
+                <a:spcPts val="0"/>
+              </a:spcAft>
+            </a:pPr>
+            <a:r>
+              <a:rPr sz="1200" b="1" i="0">
+                <a:solidFill>
+                  <a:srgbClr val="F3C6CF"/>
+                </a:solidFill>
+                <a:latin typeface="Calibri"/>
+              </a:rPr>
+              <a:t>SECTION 07</a:t>
+            </a:r>
+          </a:p>
+        </p:txBody>
+      </p:sp>
+      <p:sp>
+        <p:nvSpPr>
+          <p:cNvPr id="5" name="Rectangle 4"/>
           <p:cNvSpPr/>
           <p:nvPr/>
         </p:nvSpPr>
         <p:spPr>
           <a:xfrm>
-            <a:off x="868680" y="1051560"/>
-            <a:ext cx="1325880" cy="1325880"/>
-          </a:xfrm>
-          <a:prstGeom prst="ellipse">
+            <a:off x="868680" y="3127248"/>
+            <a:ext cx="289560" cy="54864"/>
+          </a:xfrm>
+          <a:prstGeom prst="rect">
             <a:avLst/>
           </a:prstGeom>
           <a:solidFill>
-            <a:srgbClr val="A51C30"/>
+            <a:srgbClr val="00B3A4"/>
           </a:solidFill>
           <a:ln>
             <a:noFill/>
@@ -27290,31 +28897,242 @@
           </a:fontRef>
         </p:style>
         <p:txBody>
-          <a:bodyPr rtlCol="0" anchor="ctr" lIns="0" rIns="0" tIns="0" bIns="0"/>
+          <a:bodyPr rtlCol="0" anchor="ctr"/>
           <a:lstStyle/>
           <a:p>
             <a:pPr algn="ctr"/>
-            <a:r>
-              <a:rPr sz="4800" b="1">
-                <a:solidFill>
-                  <a:srgbClr val="FFFFFF"/>
-                </a:solidFill>
-                <a:latin typeface="Calibri"/>
-              </a:rPr>
-              <a:t>7</a:t>
-            </a:r>
-          </a:p>
-        </p:txBody>
-      </p:sp>
-      <p:sp>
-        <p:nvSpPr>
-          <p:cNvPr id="4" name="TextBox 3"/>
+          </a:p>
+        </p:txBody>
+      </p:sp>
+      <p:sp>
+        <p:nvSpPr>
+          <p:cNvPr id="6" name="Rectangle 5"/>
+          <p:cNvSpPr/>
+          <p:nvPr/>
+        </p:nvSpPr>
+        <p:spPr>
+          <a:xfrm>
+            <a:off x="1158240" y="3127248"/>
+            <a:ext cx="289560" cy="54864"/>
+          </a:xfrm>
+          <a:prstGeom prst="rect">
+            <a:avLst/>
+          </a:prstGeom>
+          <a:solidFill>
+            <a:srgbClr val="2FB673"/>
+          </a:solidFill>
+          <a:ln>
+            <a:noFill/>
+          </a:ln>
+          <a:effectLst/>
+        </p:spPr>
+        <p:style>
+          <a:lnRef idx="1">
+            <a:schemeClr val="accent1"/>
+          </a:lnRef>
+          <a:fillRef idx="3">
+            <a:schemeClr val="accent1"/>
+          </a:fillRef>
+          <a:effectRef idx="2">
+            <a:schemeClr val="accent1"/>
+          </a:effectRef>
+          <a:fontRef idx="minor">
+            <a:schemeClr val="lt1"/>
+          </a:fontRef>
+        </p:style>
+        <p:txBody>
+          <a:bodyPr rtlCol="0" anchor="ctr"/>
+          <a:lstStyle/>
+          <a:p>
+            <a:pPr algn="ctr"/>
+          </a:p>
+        </p:txBody>
+      </p:sp>
+      <p:sp>
+        <p:nvSpPr>
+          <p:cNvPr id="7" name="Rectangle 6"/>
+          <p:cNvSpPr/>
+          <p:nvPr/>
+        </p:nvSpPr>
+        <p:spPr>
+          <a:xfrm>
+            <a:off x="1447800" y="3127248"/>
+            <a:ext cx="289560" cy="54864"/>
+          </a:xfrm>
+          <a:prstGeom prst="rect">
+            <a:avLst/>
+          </a:prstGeom>
+          <a:solidFill>
+            <a:srgbClr val="8CBF3F"/>
+          </a:solidFill>
+          <a:ln>
+            <a:noFill/>
+          </a:ln>
+          <a:effectLst/>
+        </p:spPr>
+        <p:style>
+          <a:lnRef idx="1">
+            <a:schemeClr val="accent1"/>
+          </a:lnRef>
+          <a:fillRef idx="3">
+            <a:schemeClr val="accent1"/>
+          </a:fillRef>
+          <a:effectRef idx="2">
+            <a:schemeClr val="accent1"/>
+          </a:effectRef>
+          <a:fontRef idx="minor">
+            <a:schemeClr val="lt1"/>
+          </a:fontRef>
+        </p:style>
+        <p:txBody>
+          <a:bodyPr rtlCol="0" anchor="ctr"/>
+          <a:lstStyle/>
+          <a:p>
+            <a:pPr algn="ctr"/>
+          </a:p>
+        </p:txBody>
+      </p:sp>
+      <p:sp>
+        <p:nvSpPr>
+          <p:cNvPr id="8" name="Rectangle 7"/>
+          <p:cNvSpPr/>
+          <p:nvPr/>
+        </p:nvSpPr>
+        <p:spPr>
+          <a:xfrm>
+            <a:off x="1737360" y="3127248"/>
+            <a:ext cx="289560" cy="54864"/>
+          </a:xfrm>
+          <a:prstGeom prst="rect">
+            <a:avLst/>
+          </a:prstGeom>
+          <a:solidFill>
+            <a:srgbClr val="E8B33A"/>
+          </a:solidFill>
+          <a:ln>
+            <a:noFill/>
+          </a:ln>
+          <a:effectLst/>
+        </p:spPr>
+        <p:style>
+          <a:lnRef idx="1">
+            <a:schemeClr val="accent1"/>
+          </a:lnRef>
+          <a:fillRef idx="3">
+            <a:schemeClr val="accent1"/>
+          </a:fillRef>
+          <a:effectRef idx="2">
+            <a:schemeClr val="accent1"/>
+          </a:effectRef>
+          <a:fontRef idx="minor">
+            <a:schemeClr val="lt1"/>
+          </a:fontRef>
+        </p:style>
+        <p:txBody>
+          <a:bodyPr rtlCol="0" anchor="ctr"/>
+          <a:lstStyle/>
+          <a:p>
+            <a:pPr algn="ctr"/>
+          </a:p>
+        </p:txBody>
+      </p:sp>
+      <p:sp>
+        <p:nvSpPr>
+          <p:cNvPr id="9" name="Rectangle 8"/>
+          <p:cNvSpPr/>
+          <p:nvPr/>
+        </p:nvSpPr>
+        <p:spPr>
+          <a:xfrm>
+            <a:off x="2026920" y="3127248"/>
+            <a:ext cx="289560" cy="54864"/>
+          </a:xfrm>
+          <a:prstGeom prst="rect">
+            <a:avLst/>
+          </a:prstGeom>
+          <a:solidFill>
+            <a:srgbClr val="E8823A"/>
+          </a:solidFill>
+          <a:ln>
+            <a:noFill/>
+          </a:ln>
+          <a:effectLst/>
+        </p:spPr>
+        <p:style>
+          <a:lnRef idx="1">
+            <a:schemeClr val="accent1"/>
+          </a:lnRef>
+          <a:fillRef idx="3">
+            <a:schemeClr val="accent1"/>
+          </a:fillRef>
+          <a:effectRef idx="2">
+            <a:schemeClr val="accent1"/>
+          </a:effectRef>
+          <a:fontRef idx="minor">
+            <a:schemeClr val="lt1"/>
+          </a:fontRef>
+        </p:style>
+        <p:txBody>
+          <a:bodyPr rtlCol="0" anchor="ctr"/>
+          <a:lstStyle/>
+          <a:p>
+            <a:pPr algn="ctr"/>
+          </a:p>
+        </p:txBody>
+      </p:sp>
+      <p:sp>
+        <p:nvSpPr>
+          <p:cNvPr id="10" name="Rectangle 9"/>
+          <p:cNvSpPr/>
+          <p:nvPr/>
+        </p:nvSpPr>
+        <p:spPr>
+          <a:xfrm>
+            <a:off x="2316480" y="3127248"/>
+            <a:ext cx="289560" cy="54864"/>
+          </a:xfrm>
+          <a:prstGeom prst="rect">
+            <a:avLst/>
+          </a:prstGeom>
+          <a:solidFill>
+            <a:srgbClr val="D9534F"/>
+          </a:solidFill>
+          <a:ln>
+            <a:noFill/>
+          </a:ln>
+          <a:effectLst/>
+        </p:spPr>
+        <p:style>
+          <a:lnRef idx="1">
+            <a:schemeClr val="accent1"/>
+          </a:lnRef>
+          <a:fillRef idx="3">
+            <a:schemeClr val="accent1"/>
+          </a:fillRef>
+          <a:effectRef idx="2">
+            <a:schemeClr val="accent1"/>
+          </a:effectRef>
+          <a:fontRef idx="minor">
+            <a:schemeClr val="lt1"/>
+          </a:fontRef>
+        </p:style>
+        <p:txBody>
+          <a:bodyPr rtlCol="0" anchor="ctr"/>
+          <a:lstStyle/>
+          <a:p>
+            <a:pPr algn="ctr"/>
+          </a:p>
+        </p:txBody>
+      </p:sp>
+      <p:sp>
+        <p:nvSpPr>
+          <p:cNvPr id="11" name="TextBox 10"/>
           <p:cNvSpPr txBox="1"/>
           <p:nvPr/>
         </p:nvSpPr>
         <p:spPr>
           <a:xfrm>
-            <a:off x="868680" y="2697480"/>
+            <a:off x="868680" y="3310128"/>
             <a:ext cx="5956840" cy="1330960"/>
           </a:xfrm>
           <a:prstGeom prst="rect">
@@ -27353,14 +29171,14 @@
       </p:sp>
       <p:sp>
         <p:nvSpPr>
-          <p:cNvPr id="5" name="TextBox 4"/>
+          <p:cNvPr id="12" name="TextBox 11"/>
           <p:cNvSpPr txBox="1"/>
           <p:nvPr/>
         </p:nvSpPr>
         <p:spPr>
           <a:xfrm>
-            <a:off x="868680" y="4257040"/>
-            <a:ext cx="5956840" cy="1960879"/>
+            <a:off x="868680" y="4833112"/>
+            <a:ext cx="5956840" cy="1384807"/>
           </a:xfrm>
           <a:prstGeom prst="rect">
             <a:avLst/>
@@ -27398,13 +29216,13 @@
       </p:sp>
       <p:sp>
         <p:nvSpPr>
-          <p:cNvPr id="6" name="TextBox 5"/>
+          <p:cNvPr id="13" name="TextBox 12"/>
           <p:cNvSpPr txBox="1"/>
           <p:nvPr/>
         </p:nvSpPr>
         <p:spPr>
           <a:xfrm>
-            <a:off x="7585057" y="1097280"/>
+            <a:off x="7585057" y="2788920"/>
             <a:ext cx="3829397" cy="274320"/>
           </a:xfrm>
           <a:prstGeom prst="rect">
@@ -27443,14 +29261,14 @@
       </p:sp>
       <p:sp>
         <p:nvSpPr>
-          <p:cNvPr id="7" name="TextBox 6"/>
+          <p:cNvPr id="14" name="TextBox 13"/>
           <p:cNvSpPr txBox="1"/>
           <p:nvPr/>
         </p:nvSpPr>
         <p:spPr>
           <a:xfrm>
-            <a:off x="7585057" y="1481328"/>
-            <a:ext cx="3829397" cy="4206240"/>
+            <a:off x="7585057" y="3154680"/>
+            <a:ext cx="3829397" cy="3063239"/>
           </a:xfrm>
           <a:prstGeom prst="rect">
             <a:avLst/>
@@ -27471,11 +29289,11 @@
                 <a:spcPts val="0"/>
               </a:spcBef>
               <a:spcAft>
-                <a:spcPts val="900"/>
-              </a:spcAft>
-            </a:pPr>
-            <a:r>
-              <a:rPr sz="1500" b="1">
+                <a:spcPts val="800"/>
+              </a:spcAft>
+            </a:pPr>
+            <a:r>
+              <a:rPr sz="1400" b="1">
                 <a:solidFill>
                   <a:srgbClr val="F3C6CF"/>
                 </a:solidFill>
@@ -27484,7 +29302,7 @@
               <a:t>01   </a:t>
             </a:r>
             <a:r>
-              <a:rPr sz="1500" b="0">
+              <a:rPr sz="1400" b="0">
                 <a:solidFill>
                   <a:srgbClr val="FFFFFF"/>
                 </a:solidFill>
@@ -27502,11 +29320,11 @@
                 <a:spcPts val="0"/>
               </a:spcBef>
               <a:spcAft>
-                <a:spcPts val="900"/>
-              </a:spcAft>
-            </a:pPr>
-            <a:r>
-              <a:rPr sz="1500" b="1">
+                <a:spcPts val="800"/>
+              </a:spcAft>
+            </a:pPr>
+            <a:r>
+              <a:rPr sz="1400" b="1">
                 <a:solidFill>
                   <a:srgbClr val="F3C6CF"/>
                 </a:solidFill>
@@ -27515,7 +29333,7 @@
               <a:t>02   </a:t>
             </a:r>
             <a:r>
-              <a:rPr sz="1500" b="0">
+              <a:rPr sz="1400" b="0">
                 <a:solidFill>
                   <a:srgbClr val="FFFFFF"/>
                 </a:solidFill>
@@ -27533,11 +29351,11 @@
                 <a:spcPts val="0"/>
               </a:spcBef>
               <a:spcAft>
-                <a:spcPts val="900"/>
-              </a:spcAft>
-            </a:pPr>
-            <a:r>
-              <a:rPr sz="1500" b="1">
+                <a:spcPts val="800"/>
+              </a:spcAft>
+            </a:pPr>
+            <a:r>
+              <a:rPr sz="1400" b="1">
                 <a:solidFill>
                   <a:srgbClr val="F3C6CF"/>
                 </a:solidFill>
@@ -27546,7 +29364,7 @@
               <a:t>03   </a:t>
             </a:r>
             <a:r>
-              <a:rPr sz="1500" b="0">
+              <a:rPr sz="1400" b="0">
                 <a:solidFill>
                   <a:srgbClr val="FFFFFF"/>
                 </a:solidFill>
@@ -31747,20 +33565,112 @@
       </p:sp>
       <p:sp>
         <p:nvSpPr>
-          <p:cNvPr id="3" name="Oval 2"/>
+          <p:cNvPr id="3" name="TextBox 2"/>
+          <p:cNvSpPr txBox="1"/>
+          <p:nvPr/>
+        </p:nvSpPr>
+        <p:spPr>
+          <a:xfrm>
+            <a:off x="5244870" y="137160"/>
+            <a:ext cx="6169584" cy="2514600"/>
+          </a:xfrm>
+          <a:prstGeom prst="rect">
+            <a:avLst/>
+          </a:prstGeom>
+          <a:noFill/>
+        </p:spPr>
+        <p:txBody>
+          <a:bodyPr wrap="square" lIns="0" rIns="0" tIns="0" bIns="0" anchor="t">
+            <a:spAutoFit/>
+          </a:bodyPr>
+          <a:lstStyle/>
+          <a:p>
+            <a:pPr algn="r">
+              <a:lnSpc>
+                <a:spcPct val="100000"/>
+              </a:lnSpc>
+              <a:spcBef>
+                <a:spcPts val="0"/>
+              </a:spcBef>
+              <a:spcAft>
+                <a:spcPts val="0"/>
+              </a:spcAft>
+            </a:pPr>
+            <a:r>
+              <a:rPr sz="16500" b="1" i="0">
+                <a:solidFill>
+                  <a:srgbClr val="FFFFFF">
+                    <a:alpha val="13000"/>
+                  </a:srgbClr>
+                </a:solidFill>
+                <a:latin typeface="Calibri"/>
+              </a:rPr>
+              <a:t>08</a:t>
+            </a:r>
+          </a:p>
+        </p:txBody>
+      </p:sp>
+      <p:sp>
+        <p:nvSpPr>
+          <p:cNvPr id="4" name="TextBox 3"/>
+          <p:cNvSpPr txBox="1"/>
+          <p:nvPr/>
+        </p:nvSpPr>
+        <p:spPr>
+          <a:xfrm>
+            <a:off x="868680" y="2743200"/>
+            <a:ext cx="5318607" cy="274320"/>
+          </a:xfrm>
+          <a:prstGeom prst="rect">
+            <a:avLst/>
+          </a:prstGeom>
+          <a:noFill/>
+        </p:spPr>
+        <p:txBody>
+          <a:bodyPr wrap="square" lIns="0" rIns="0" tIns="0" bIns="0" anchor="t">
+            <a:spAutoFit/>
+          </a:bodyPr>
+          <a:lstStyle/>
+          <a:p>
+            <a:pPr algn="l">
+              <a:lnSpc>
+                <a:spcPct val="120000"/>
+              </a:lnSpc>
+              <a:spcBef>
+                <a:spcPts val="0"/>
+              </a:spcBef>
+              <a:spcAft>
+                <a:spcPts val="0"/>
+              </a:spcAft>
+            </a:pPr>
+            <a:r>
+              <a:rPr sz="1200" b="1" i="0">
+                <a:solidFill>
+                  <a:srgbClr val="F3C6CF"/>
+                </a:solidFill>
+                <a:latin typeface="Calibri"/>
+              </a:rPr>
+              <a:t>SECTION 08</a:t>
+            </a:r>
+          </a:p>
+        </p:txBody>
+      </p:sp>
+      <p:sp>
+        <p:nvSpPr>
+          <p:cNvPr id="5" name="Rectangle 4"/>
           <p:cNvSpPr/>
           <p:nvPr/>
         </p:nvSpPr>
         <p:spPr>
           <a:xfrm>
-            <a:off x="868680" y="1051560"/>
-            <a:ext cx="1325880" cy="1325880"/>
-          </a:xfrm>
-          <a:prstGeom prst="ellipse">
+            <a:off x="868680" y="3127248"/>
+            <a:ext cx="289560" cy="54864"/>
+          </a:xfrm>
+          <a:prstGeom prst="rect">
             <a:avLst/>
           </a:prstGeom>
           <a:solidFill>
-            <a:srgbClr val="A51C30"/>
+            <a:srgbClr val="00B3A4"/>
           </a:solidFill>
           <a:ln>
             <a:noFill/>
@@ -31782,31 +33692,242 @@
           </a:fontRef>
         </p:style>
         <p:txBody>
-          <a:bodyPr rtlCol="0" anchor="ctr" lIns="0" rIns="0" tIns="0" bIns="0"/>
+          <a:bodyPr rtlCol="0" anchor="ctr"/>
           <a:lstStyle/>
           <a:p>
             <a:pPr algn="ctr"/>
-            <a:r>
-              <a:rPr sz="4800" b="1">
-                <a:solidFill>
-                  <a:srgbClr val="FFFFFF"/>
-                </a:solidFill>
-                <a:latin typeface="Calibri"/>
-              </a:rPr>
-              <a:t>8</a:t>
-            </a:r>
-          </a:p>
-        </p:txBody>
-      </p:sp>
-      <p:sp>
-        <p:nvSpPr>
-          <p:cNvPr id="4" name="TextBox 3"/>
+          </a:p>
+        </p:txBody>
+      </p:sp>
+      <p:sp>
+        <p:nvSpPr>
+          <p:cNvPr id="6" name="Rectangle 5"/>
+          <p:cNvSpPr/>
+          <p:nvPr/>
+        </p:nvSpPr>
+        <p:spPr>
+          <a:xfrm>
+            <a:off x="1158240" y="3127248"/>
+            <a:ext cx="289560" cy="54864"/>
+          </a:xfrm>
+          <a:prstGeom prst="rect">
+            <a:avLst/>
+          </a:prstGeom>
+          <a:solidFill>
+            <a:srgbClr val="2FB673"/>
+          </a:solidFill>
+          <a:ln>
+            <a:noFill/>
+          </a:ln>
+          <a:effectLst/>
+        </p:spPr>
+        <p:style>
+          <a:lnRef idx="1">
+            <a:schemeClr val="accent1"/>
+          </a:lnRef>
+          <a:fillRef idx="3">
+            <a:schemeClr val="accent1"/>
+          </a:fillRef>
+          <a:effectRef idx="2">
+            <a:schemeClr val="accent1"/>
+          </a:effectRef>
+          <a:fontRef idx="minor">
+            <a:schemeClr val="lt1"/>
+          </a:fontRef>
+        </p:style>
+        <p:txBody>
+          <a:bodyPr rtlCol="0" anchor="ctr"/>
+          <a:lstStyle/>
+          <a:p>
+            <a:pPr algn="ctr"/>
+          </a:p>
+        </p:txBody>
+      </p:sp>
+      <p:sp>
+        <p:nvSpPr>
+          <p:cNvPr id="7" name="Rectangle 6"/>
+          <p:cNvSpPr/>
+          <p:nvPr/>
+        </p:nvSpPr>
+        <p:spPr>
+          <a:xfrm>
+            <a:off x="1447800" y="3127248"/>
+            <a:ext cx="289560" cy="54864"/>
+          </a:xfrm>
+          <a:prstGeom prst="rect">
+            <a:avLst/>
+          </a:prstGeom>
+          <a:solidFill>
+            <a:srgbClr val="8CBF3F"/>
+          </a:solidFill>
+          <a:ln>
+            <a:noFill/>
+          </a:ln>
+          <a:effectLst/>
+        </p:spPr>
+        <p:style>
+          <a:lnRef idx="1">
+            <a:schemeClr val="accent1"/>
+          </a:lnRef>
+          <a:fillRef idx="3">
+            <a:schemeClr val="accent1"/>
+          </a:fillRef>
+          <a:effectRef idx="2">
+            <a:schemeClr val="accent1"/>
+          </a:effectRef>
+          <a:fontRef idx="minor">
+            <a:schemeClr val="lt1"/>
+          </a:fontRef>
+        </p:style>
+        <p:txBody>
+          <a:bodyPr rtlCol="0" anchor="ctr"/>
+          <a:lstStyle/>
+          <a:p>
+            <a:pPr algn="ctr"/>
+          </a:p>
+        </p:txBody>
+      </p:sp>
+      <p:sp>
+        <p:nvSpPr>
+          <p:cNvPr id="8" name="Rectangle 7"/>
+          <p:cNvSpPr/>
+          <p:nvPr/>
+        </p:nvSpPr>
+        <p:spPr>
+          <a:xfrm>
+            <a:off x="1737360" y="3127248"/>
+            <a:ext cx="289560" cy="54864"/>
+          </a:xfrm>
+          <a:prstGeom prst="rect">
+            <a:avLst/>
+          </a:prstGeom>
+          <a:solidFill>
+            <a:srgbClr val="E8B33A"/>
+          </a:solidFill>
+          <a:ln>
+            <a:noFill/>
+          </a:ln>
+          <a:effectLst/>
+        </p:spPr>
+        <p:style>
+          <a:lnRef idx="1">
+            <a:schemeClr val="accent1"/>
+          </a:lnRef>
+          <a:fillRef idx="3">
+            <a:schemeClr val="accent1"/>
+          </a:fillRef>
+          <a:effectRef idx="2">
+            <a:schemeClr val="accent1"/>
+          </a:effectRef>
+          <a:fontRef idx="minor">
+            <a:schemeClr val="lt1"/>
+          </a:fontRef>
+        </p:style>
+        <p:txBody>
+          <a:bodyPr rtlCol="0" anchor="ctr"/>
+          <a:lstStyle/>
+          <a:p>
+            <a:pPr algn="ctr"/>
+          </a:p>
+        </p:txBody>
+      </p:sp>
+      <p:sp>
+        <p:nvSpPr>
+          <p:cNvPr id="9" name="Rectangle 8"/>
+          <p:cNvSpPr/>
+          <p:nvPr/>
+        </p:nvSpPr>
+        <p:spPr>
+          <a:xfrm>
+            <a:off x="2026920" y="3127248"/>
+            <a:ext cx="289560" cy="54864"/>
+          </a:xfrm>
+          <a:prstGeom prst="rect">
+            <a:avLst/>
+          </a:prstGeom>
+          <a:solidFill>
+            <a:srgbClr val="E8823A"/>
+          </a:solidFill>
+          <a:ln>
+            <a:noFill/>
+          </a:ln>
+          <a:effectLst/>
+        </p:spPr>
+        <p:style>
+          <a:lnRef idx="1">
+            <a:schemeClr val="accent1"/>
+          </a:lnRef>
+          <a:fillRef idx="3">
+            <a:schemeClr val="accent1"/>
+          </a:fillRef>
+          <a:effectRef idx="2">
+            <a:schemeClr val="accent1"/>
+          </a:effectRef>
+          <a:fontRef idx="minor">
+            <a:schemeClr val="lt1"/>
+          </a:fontRef>
+        </p:style>
+        <p:txBody>
+          <a:bodyPr rtlCol="0" anchor="ctr"/>
+          <a:lstStyle/>
+          <a:p>
+            <a:pPr algn="ctr"/>
+          </a:p>
+        </p:txBody>
+      </p:sp>
+      <p:sp>
+        <p:nvSpPr>
+          <p:cNvPr id="10" name="Rectangle 9"/>
+          <p:cNvSpPr/>
+          <p:nvPr/>
+        </p:nvSpPr>
+        <p:spPr>
+          <a:xfrm>
+            <a:off x="2316480" y="3127248"/>
+            <a:ext cx="289560" cy="54864"/>
+          </a:xfrm>
+          <a:prstGeom prst="rect">
+            <a:avLst/>
+          </a:prstGeom>
+          <a:solidFill>
+            <a:srgbClr val="D9534F"/>
+          </a:solidFill>
+          <a:ln>
+            <a:noFill/>
+          </a:ln>
+          <a:effectLst/>
+        </p:spPr>
+        <p:style>
+          <a:lnRef idx="1">
+            <a:schemeClr val="accent1"/>
+          </a:lnRef>
+          <a:fillRef idx="3">
+            <a:schemeClr val="accent1"/>
+          </a:fillRef>
+          <a:effectRef idx="2">
+            <a:schemeClr val="accent1"/>
+          </a:effectRef>
+          <a:fontRef idx="minor">
+            <a:schemeClr val="lt1"/>
+          </a:fontRef>
+        </p:style>
+        <p:txBody>
+          <a:bodyPr rtlCol="0" anchor="ctr"/>
+          <a:lstStyle/>
+          <a:p>
+            <a:pPr algn="ctr"/>
+          </a:p>
+        </p:txBody>
+      </p:sp>
+      <p:sp>
+        <p:nvSpPr>
+          <p:cNvPr id="11" name="TextBox 10"/>
           <p:cNvSpPr txBox="1"/>
           <p:nvPr/>
         </p:nvSpPr>
         <p:spPr>
           <a:xfrm>
-            <a:off x="868680" y="2697480"/>
+            <a:off x="868680" y="3310128"/>
             <a:ext cx="5956840" cy="688340"/>
           </a:xfrm>
           <a:prstGeom prst="rect">
@@ -31845,14 +33966,14 @@
       </p:sp>
       <p:sp>
         <p:nvSpPr>
-          <p:cNvPr id="5" name="TextBox 4"/>
+          <p:cNvPr id="12" name="TextBox 11"/>
           <p:cNvSpPr txBox="1"/>
           <p:nvPr/>
         </p:nvSpPr>
         <p:spPr>
           <a:xfrm>
-            <a:off x="868680" y="3614420"/>
-            <a:ext cx="5956840" cy="2603499"/>
+            <a:off x="868680" y="4190491"/>
+            <a:ext cx="5956840" cy="2027428"/>
           </a:xfrm>
           <a:prstGeom prst="rect">
             <a:avLst/>
@@ -31890,13 +34011,13 @@
       </p:sp>
       <p:sp>
         <p:nvSpPr>
-          <p:cNvPr id="6" name="TextBox 5"/>
+          <p:cNvPr id="13" name="TextBox 12"/>
           <p:cNvSpPr txBox="1"/>
           <p:nvPr/>
         </p:nvSpPr>
         <p:spPr>
           <a:xfrm>
-            <a:off x="7585057" y="1097280"/>
+            <a:off x="7585057" y="2788920"/>
             <a:ext cx="3829397" cy="274320"/>
           </a:xfrm>
           <a:prstGeom prst="rect">
@@ -31935,14 +34056,14 @@
       </p:sp>
       <p:sp>
         <p:nvSpPr>
-          <p:cNvPr id="7" name="TextBox 6"/>
+          <p:cNvPr id="14" name="TextBox 13"/>
           <p:cNvSpPr txBox="1"/>
           <p:nvPr/>
         </p:nvSpPr>
         <p:spPr>
           <a:xfrm>
-            <a:off x="7585057" y="1481328"/>
-            <a:ext cx="3829397" cy="4206240"/>
+            <a:off x="7585057" y="3154680"/>
+            <a:ext cx="3829397" cy="3063239"/>
           </a:xfrm>
           <a:prstGeom prst="rect">
             <a:avLst/>
@@ -31963,11 +34084,11 @@
                 <a:spcPts val="0"/>
               </a:spcBef>
               <a:spcAft>
-                <a:spcPts val="900"/>
-              </a:spcAft>
-            </a:pPr>
-            <a:r>
-              <a:rPr sz="1500" b="1">
+                <a:spcPts val="800"/>
+              </a:spcAft>
+            </a:pPr>
+            <a:r>
+              <a:rPr sz="1400" b="1">
                 <a:solidFill>
                   <a:srgbClr val="F3C6CF"/>
                 </a:solidFill>
@@ -31976,7 +34097,7 @@
               <a:t>01   </a:t>
             </a:r>
             <a:r>
-              <a:rPr sz="1500" b="0">
+              <a:rPr sz="1400" b="0">
                 <a:solidFill>
                   <a:srgbClr val="FFFFFF"/>
                 </a:solidFill>
@@ -31994,11 +34115,11 @@
                 <a:spcPts val="0"/>
               </a:spcBef>
               <a:spcAft>
-                <a:spcPts val="900"/>
-              </a:spcAft>
-            </a:pPr>
-            <a:r>
-              <a:rPr sz="1500" b="1">
+                <a:spcPts val="800"/>
+              </a:spcAft>
+            </a:pPr>
+            <a:r>
+              <a:rPr sz="1400" b="1">
                 <a:solidFill>
                   <a:srgbClr val="F3C6CF"/>
                 </a:solidFill>
@@ -32007,7 +34128,7 @@
               <a:t>02   </a:t>
             </a:r>
             <a:r>
-              <a:rPr sz="1500" b="0">
+              <a:rPr sz="1400" b="0">
                 <a:solidFill>
                   <a:srgbClr val="FFFFFF"/>
                 </a:solidFill>
@@ -32025,11 +34146,11 @@
                 <a:spcPts val="0"/>
               </a:spcBef>
               <a:spcAft>
-                <a:spcPts val="900"/>
-              </a:spcAft>
-            </a:pPr>
-            <a:r>
-              <a:rPr sz="1500" b="1">
+                <a:spcPts val="800"/>
+              </a:spcAft>
+            </a:pPr>
+            <a:r>
+              <a:rPr sz="1400" b="1">
                 <a:solidFill>
                   <a:srgbClr val="F3C6CF"/>
                 </a:solidFill>
@@ -32038,7 +34159,7 @@
               <a:t>03   </a:t>
             </a:r>
             <a:r>
-              <a:rPr sz="1500" b="0">
+              <a:rPr sz="1400" b="0">
                 <a:solidFill>
                   <a:srgbClr val="FFFFFF"/>
                 </a:solidFill>
@@ -32056,11 +34177,11 @@
                 <a:spcPts val="0"/>
               </a:spcBef>
               <a:spcAft>
-                <a:spcPts val="900"/>
-              </a:spcAft>
-            </a:pPr>
-            <a:r>
-              <a:rPr sz="1500" b="1">
+                <a:spcPts val="800"/>
+              </a:spcAft>
+            </a:pPr>
+            <a:r>
+              <a:rPr sz="1400" b="1">
                 <a:solidFill>
                   <a:srgbClr val="F3C6CF"/>
                 </a:solidFill>
@@ -32069,7 +34190,7 @@
               <a:t>04   </a:t>
             </a:r>
             <a:r>
-              <a:rPr sz="1500" b="0">
+              <a:rPr sz="1400" b="0">
                 <a:solidFill>
                   <a:srgbClr val="FFFFFF"/>
                 </a:solidFill>
@@ -32087,11 +34208,11 @@
                 <a:spcPts val="0"/>
               </a:spcBef>
               <a:spcAft>
-                <a:spcPts val="900"/>
-              </a:spcAft>
-            </a:pPr>
-            <a:r>
-              <a:rPr sz="1500" b="1">
+                <a:spcPts val="800"/>
+              </a:spcAft>
+            </a:pPr>
+            <a:r>
+              <a:rPr sz="1400" b="1">
                 <a:solidFill>
                   <a:srgbClr val="F3C6CF"/>
                 </a:solidFill>
@@ -32100,7 +34221,7 @@
               <a:t>05   </a:t>
             </a:r>
             <a:r>
-              <a:rPr sz="1500" b="0">
+              <a:rPr sz="1400" b="0">
                 <a:solidFill>
                   <a:srgbClr val="FFFFFF"/>
                 </a:solidFill>
@@ -36819,20 +38940,112 @@
       </p:sp>
       <p:sp>
         <p:nvSpPr>
-          <p:cNvPr id="3" name="Oval 2"/>
+          <p:cNvPr id="3" name="TextBox 2"/>
+          <p:cNvSpPr txBox="1"/>
+          <p:nvPr/>
+        </p:nvSpPr>
+        <p:spPr>
+          <a:xfrm>
+            <a:off x="5244870" y="137160"/>
+            <a:ext cx="6169584" cy="2514600"/>
+          </a:xfrm>
+          <a:prstGeom prst="rect">
+            <a:avLst/>
+          </a:prstGeom>
+          <a:noFill/>
+        </p:spPr>
+        <p:txBody>
+          <a:bodyPr wrap="square" lIns="0" rIns="0" tIns="0" bIns="0" anchor="t">
+            <a:spAutoFit/>
+          </a:bodyPr>
+          <a:lstStyle/>
+          <a:p>
+            <a:pPr algn="r">
+              <a:lnSpc>
+                <a:spcPct val="100000"/>
+              </a:lnSpc>
+              <a:spcBef>
+                <a:spcPts val="0"/>
+              </a:spcBef>
+              <a:spcAft>
+                <a:spcPts val="0"/>
+              </a:spcAft>
+            </a:pPr>
+            <a:r>
+              <a:rPr sz="16500" b="1" i="0">
+                <a:solidFill>
+                  <a:srgbClr val="FFFFFF">
+                    <a:alpha val="13000"/>
+                  </a:srgbClr>
+                </a:solidFill>
+                <a:latin typeface="Calibri"/>
+              </a:rPr>
+              <a:t>09</a:t>
+            </a:r>
+          </a:p>
+        </p:txBody>
+      </p:sp>
+      <p:sp>
+        <p:nvSpPr>
+          <p:cNvPr id="4" name="TextBox 3"/>
+          <p:cNvSpPr txBox="1"/>
+          <p:nvPr/>
+        </p:nvSpPr>
+        <p:spPr>
+          <a:xfrm>
+            <a:off x="868680" y="2743200"/>
+            <a:ext cx="5318607" cy="274320"/>
+          </a:xfrm>
+          <a:prstGeom prst="rect">
+            <a:avLst/>
+          </a:prstGeom>
+          <a:noFill/>
+        </p:spPr>
+        <p:txBody>
+          <a:bodyPr wrap="square" lIns="0" rIns="0" tIns="0" bIns="0" anchor="t">
+            <a:spAutoFit/>
+          </a:bodyPr>
+          <a:lstStyle/>
+          <a:p>
+            <a:pPr algn="l">
+              <a:lnSpc>
+                <a:spcPct val="120000"/>
+              </a:lnSpc>
+              <a:spcBef>
+                <a:spcPts val="0"/>
+              </a:spcBef>
+              <a:spcAft>
+                <a:spcPts val="0"/>
+              </a:spcAft>
+            </a:pPr>
+            <a:r>
+              <a:rPr sz="1200" b="1" i="0">
+                <a:solidFill>
+                  <a:srgbClr val="F3C6CF"/>
+                </a:solidFill>
+                <a:latin typeface="Calibri"/>
+              </a:rPr>
+              <a:t>SECTION 09</a:t>
+            </a:r>
+          </a:p>
+        </p:txBody>
+      </p:sp>
+      <p:sp>
+        <p:nvSpPr>
+          <p:cNvPr id="5" name="Rectangle 4"/>
           <p:cNvSpPr/>
           <p:nvPr/>
         </p:nvSpPr>
         <p:spPr>
           <a:xfrm>
-            <a:off x="868680" y="1051560"/>
-            <a:ext cx="1325880" cy="1325880"/>
-          </a:xfrm>
-          <a:prstGeom prst="ellipse">
+            <a:off x="868680" y="3127248"/>
+            <a:ext cx="289560" cy="54864"/>
+          </a:xfrm>
+          <a:prstGeom prst="rect">
             <a:avLst/>
           </a:prstGeom>
           <a:solidFill>
-            <a:srgbClr val="A51C30"/>
+            <a:srgbClr val="00B3A4"/>
           </a:solidFill>
           <a:ln>
             <a:noFill/>
@@ -36854,31 +39067,242 @@
           </a:fontRef>
         </p:style>
         <p:txBody>
-          <a:bodyPr rtlCol="0" anchor="ctr" lIns="0" rIns="0" tIns="0" bIns="0"/>
+          <a:bodyPr rtlCol="0" anchor="ctr"/>
           <a:lstStyle/>
           <a:p>
             <a:pPr algn="ctr"/>
-            <a:r>
-              <a:rPr sz="4800" b="1">
-                <a:solidFill>
-                  <a:srgbClr val="FFFFFF"/>
-                </a:solidFill>
-                <a:latin typeface="Calibri"/>
-              </a:rPr>
-              <a:t>9</a:t>
-            </a:r>
-          </a:p>
-        </p:txBody>
-      </p:sp>
-      <p:sp>
-        <p:nvSpPr>
-          <p:cNvPr id="4" name="TextBox 3"/>
+          </a:p>
+        </p:txBody>
+      </p:sp>
+      <p:sp>
+        <p:nvSpPr>
+          <p:cNvPr id="6" name="Rectangle 5"/>
+          <p:cNvSpPr/>
+          <p:nvPr/>
+        </p:nvSpPr>
+        <p:spPr>
+          <a:xfrm>
+            <a:off x="1158240" y="3127248"/>
+            <a:ext cx="289560" cy="54864"/>
+          </a:xfrm>
+          <a:prstGeom prst="rect">
+            <a:avLst/>
+          </a:prstGeom>
+          <a:solidFill>
+            <a:srgbClr val="2FB673"/>
+          </a:solidFill>
+          <a:ln>
+            <a:noFill/>
+          </a:ln>
+          <a:effectLst/>
+        </p:spPr>
+        <p:style>
+          <a:lnRef idx="1">
+            <a:schemeClr val="accent1"/>
+          </a:lnRef>
+          <a:fillRef idx="3">
+            <a:schemeClr val="accent1"/>
+          </a:fillRef>
+          <a:effectRef idx="2">
+            <a:schemeClr val="accent1"/>
+          </a:effectRef>
+          <a:fontRef idx="minor">
+            <a:schemeClr val="lt1"/>
+          </a:fontRef>
+        </p:style>
+        <p:txBody>
+          <a:bodyPr rtlCol="0" anchor="ctr"/>
+          <a:lstStyle/>
+          <a:p>
+            <a:pPr algn="ctr"/>
+          </a:p>
+        </p:txBody>
+      </p:sp>
+      <p:sp>
+        <p:nvSpPr>
+          <p:cNvPr id="7" name="Rectangle 6"/>
+          <p:cNvSpPr/>
+          <p:nvPr/>
+        </p:nvSpPr>
+        <p:spPr>
+          <a:xfrm>
+            <a:off x="1447800" y="3127248"/>
+            <a:ext cx="289560" cy="54864"/>
+          </a:xfrm>
+          <a:prstGeom prst="rect">
+            <a:avLst/>
+          </a:prstGeom>
+          <a:solidFill>
+            <a:srgbClr val="8CBF3F"/>
+          </a:solidFill>
+          <a:ln>
+            <a:noFill/>
+          </a:ln>
+          <a:effectLst/>
+        </p:spPr>
+        <p:style>
+          <a:lnRef idx="1">
+            <a:schemeClr val="accent1"/>
+          </a:lnRef>
+          <a:fillRef idx="3">
+            <a:schemeClr val="accent1"/>
+          </a:fillRef>
+          <a:effectRef idx="2">
+            <a:schemeClr val="accent1"/>
+          </a:effectRef>
+          <a:fontRef idx="minor">
+            <a:schemeClr val="lt1"/>
+          </a:fontRef>
+        </p:style>
+        <p:txBody>
+          <a:bodyPr rtlCol="0" anchor="ctr"/>
+          <a:lstStyle/>
+          <a:p>
+            <a:pPr algn="ctr"/>
+          </a:p>
+        </p:txBody>
+      </p:sp>
+      <p:sp>
+        <p:nvSpPr>
+          <p:cNvPr id="8" name="Rectangle 7"/>
+          <p:cNvSpPr/>
+          <p:nvPr/>
+        </p:nvSpPr>
+        <p:spPr>
+          <a:xfrm>
+            <a:off x="1737360" y="3127248"/>
+            <a:ext cx="289560" cy="54864"/>
+          </a:xfrm>
+          <a:prstGeom prst="rect">
+            <a:avLst/>
+          </a:prstGeom>
+          <a:solidFill>
+            <a:srgbClr val="E8B33A"/>
+          </a:solidFill>
+          <a:ln>
+            <a:noFill/>
+          </a:ln>
+          <a:effectLst/>
+        </p:spPr>
+        <p:style>
+          <a:lnRef idx="1">
+            <a:schemeClr val="accent1"/>
+          </a:lnRef>
+          <a:fillRef idx="3">
+            <a:schemeClr val="accent1"/>
+          </a:fillRef>
+          <a:effectRef idx="2">
+            <a:schemeClr val="accent1"/>
+          </a:effectRef>
+          <a:fontRef idx="minor">
+            <a:schemeClr val="lt1"/>
+          </a:fontRef>
+        </p:style>
+        <p:txBody>
+          <a:bodyPr rtlCol="0" anchor="ctr"/>
+          <a:lstStyle/>
+          <a:p>
+            <a:pPr algn="ctr"/>
+          </a:p>
+        </p:txBody>
+      </p:sp>
+      <p:sp>
+        <p:nvSpPr>
+          <p:cNvPr id="9" name="Rectangle 8"/>
+          <p:cNvSpPr/>
+          <p:nvPr/>
+        </p:nvSpPr>
+        <p:spPr>
+          <a:xfrm>
+            <a:off x="2026920" y="3127248"/>
+            <a:ext cx="289560" cy="54864"/>
+          </a:xfrm>
+          <a:prstGeom prst="rect">
+            <a:avLst/>
+          </a:prstGeom>
+          <a:solidFill>
+            <a:srgbClr val="E8823A"/>
+          </a:solidFill>
+          <a:ln>
+            <a:noFill/>
+          </a:ln>
+          <a:effectLst/>
+        </p:spPr>
+        <p:style>
+          <a:lnRef idx="1">
+            <a:schemeClr val="accent1"/>
+          </a:lnRef>
+          <a:fillRef idx="3">
+            <a:schemeClr val="accent1"/>
+          </a:fillRef>
+          <a:effectRef idx="2">
+            <a:schemeClr val="accent1"/>
+          </a:effectRef>
+          <a:fontRef idx="minor">
+            <a:schemeClr val="lt1"/>
+          </a:fontRef>
+        </p:style>
+        <p:txBody>
+          <a:bodyPr rtlCol="0" anchor="ctr"/>
+          <a:lstStyle/>
+          <a:p>
+            <a:pPr algn="ctr"/>
+          </a:p>
+        </p:txBody>
+      </p:sp>
+      <p:sp>
+        <p:nvSpPr>
+          <p:cNvPr id="10" name="Rectangle 9"/>
+          <p:cNvSpPr/>
+          <p:nvPr/>
+        </p:nvSpPr>
+        <p:spPr>
+          <a:xfrm>
+            <a:off x="2316480" y="3127248"/>
+            <a:ext cx="289560" cy="54864"/>
+          </a:xfrm>
+          <a:prstGeom prst="rect">
+            <a:avLst/>
+          </a:prstGeom>
+          <a:solidFill>
+            <a:srgbClr val="D9534F"/>
+          </a:solidFill>
+          <a:ln>
+            <a:noFill/>
+          </a:ln>
+          <a:effectLst/>
+        </p:spPr>
+        <p:style>
+          <a:lnRef idx="1">
+            <a:schemeClr val="accent1"/>
+          </a:lnRef>
+          <a:fillRef idx="3">
+            <a:schemeClr val="accent1"/>
+          </a:fillRef>
+          <a:effectRef idx="2">
+            <a:schemeClr val="accent1"/>
+          </a:effectRef>
+          <a:fontRef idx="minor">
+            <a:schemeClr val="lt1"/>
+          </a:fontRef>
+        </p:style>
+        <p:txBody>
+          <a:bodyPr rtlCol="0" anchor="ctr"/>
+          <a:lstStyle/>
+          <a:p>
+            <a:pPr algn="ctr"/>
+          </a:p>
+        </p:txBody>
+      </p:sp>
+      <p:sp>
+        <p:nvSpPr>
+          <p:cNvPr id="11" name="TextBox 10"/>
           <p:cNvSpPr txBox="1"/>
           <p:nvPr/>
         </p:nvSpPr>
         <p:spPr>
           <a:xfrm>
-            <a:off x="868680" y="2697480"/>
+            <a:off x="868680" y="3310128"/>
             <a:ext cx="5956840" cy="688340"/>
           </a:xfrm>
           <a:prstGeom prst="rect">
@@ -36917,14 +39341,14 @@
       </p:sp>
       <p:sp>
         <p:nvSpPr>
-          <p:cNvPr id="5" name="TextBox 4"/>
+          <p:cNvPr id="12" name="TextBox 11"/>
           <p:cNvSpPr txBox="1"/>
           <p:nvPr/>
         </p:nvSpPr>
         <p:spPr>
           <a:xfrm>
-            <a:off x="868680" y="3614420"/>
-            <a:ext cx="5956840" cy="2603499"/>
+            <a:off x="868680" y="4190491"/>
+            <a:ext cx="5956840" cy="2027428"/>
           </a:xfrm>
           <a:prstGeom prst="rect">
             <a:avLst/>
@@ -36962,13 +39386,13 @@
       </p:sp>
       <p:sp>
         <p:nvSpPr>
-          <p:cNvPr id="6" name="TextBox 5"/>
+          <p:cNvPr id="13" name="TextBox 12"/>
           <p:cNvSpPr txBox="1"/>
           <p:nvPr/>
         </p:nvSpPr>
         <p:spPr>
           <a:xfrm>
-            <a:off x="7585057" y="1097280"/>
+            <a:off x="7585057" y="2788920"/>
             <a:ext cx="3829397" cy="274320"/>
           </a:xfrm>
           <a:prstGeom prst="rect">
@@ -37007,14 +39431,14 @@
       </p:sp>
       <p:sp>
         <p:nvSpPr>
-          <p:cNvPr id="7" name="TextBox 6"/>
+          <p:cNvPr id="14" name="TextBox 13"/>
           <p:cNvSpPr txBox="1"/>
           <p:nvPr/>
         </p:nvSpPr>
         <p:spPr>
           <a:xfrm>
-            <a:off x="7585057" y="1481328"/>
-            <a:ext cx="3829397" cy="4206240"/>
+            <a:off x="7585057" y="3154680"/>
+            <a:ext cx="3829397" cy="3063239"/>
           </a:xfrm>
           <a:prstGeom prst="rect">
             <a:avLst/>
@@ -37035,11 +39459,11 @@
                 <a:spcPts val="0"/>
               </a:spcBef>
               <a:spcAft>
-                <a:spcPts val="900"/>
-              </a:spcAft>
-            </a:pPr>
-            <a:r>
-              <a:rPr sz="1500" b="1">
+                <a:spcPts val="800"/>
+              </a:spcAft>
+            </a:pPr>
+            <a:r>
+              <a:rPr sz="1400" b="1">
                 <a:solidFill>
                   <a:srgbClr val="F3C6CF"/>
                 </a:solidFill>
@@ -37048,7 +39472,7 @@
               <a:t>01   </a:t>
             </a:r>
             <a:r>
-              <a:rPr sz="1500" b="0">
+              <a:rPr sz="1400" b="0">
                 <a:solidFill>
                   <a:srgbClr val="FFFFFF"/>
                 </a:solidFill>
@@ -37066,11 +39490,11 @@
                 <a:spcPts val="0"/>
               </a:spcBef>
               <a:spcAft>
-                <a:spcPts val="900"/>
-              </a:spcAft>
-            </a:pPr>
-            <a:r>
-              <a:rPr sz="1500" b="1">
+                <a:spcPts val="800"/>
+              </a:spcAft>
+            </a:pPr>
+            <a:r>
+              <a:rPr sz="1400" b="1">
                 <a:solidFill>
                   <a:srgbClr val="F3C6CF"/>
                 </a:solidFill>
@@ -37079,7 +39503,7 @@
               <a:t>02   </a:t>
             </a:r>
             <a:r>
-              <a:rPr sz="1500" b="0">
+              <a:rPr sz="1400" b="0">
                 <a:solidFill>
                   <a:srgbClr val="FFFFFF"/>
                 </a:solidFill>
@@ -37097,11 +39521,11 @@
                 <a:spcPts val="0"/>
               </a:spcBef>
               <a:spcAft>
-                <a:spcPts val="900"/>
-              </a:spcAft>
-            </a:pPr>
-            <a:r>
-              <a:rPr sz="1500" b="1">
+                <a:spcPts val="800"/>
+              </a:spcAft>
+            </a:pPr>
+            <a:r>
+              <a:rPr sz="1400" b="1">
                 <a:solidFill>
                   <a:srgbClr val="F3C6CF"/>
                 </a:solidFill>
@@ -37110,7 +39534,7 @@
               <a:t>03   </a:t>
             </a:r>
             <a:r>
-              <a:rPr sz="1500" b="0">
+              <a:rPr sz="1400" b="0">
                 <a:solidFill>
                   <a:srgbClr val="FFFFFF"/>
                 </a:solidFill>
@@ -37128,11 +39552,11 @@
                 <a:spcPts val="0"/>
               </a:spcBef>
               <a:spcAft>
-                <a:spcPts val="900"/>
-              </a:spcAft>
-            </a:pPr>
-            <a:r>
-              <a:rPr sz="1500" b="1">
+                <a:spcPts val="800"/>
+              </a:spcAft>
+            </a:pPr>
+            <a:r>
+              <a:rPr sz="1400" b="1">
                 <a:solidFill>
                   <a:srgbClr val="F3C6CF"/>
                 </a:solidFill>
@@ -37141,7 +39565,7 @@
               <a:t>04   </a:t>
             </a:r>
             <a:r>
-              <a:rPr sz="1500" b="0">
+              <a:rPr sz="1400" b="0">
                 <a:solidFill>
                   <a:srgbClr val="FFFFFF"/>
                 </a:solidFill>
@@ -37159,11 +39583,11 @@
                 <a:spcPts val="0"/>
               </a:spcBef>
               <a:spcAft>
-                <a:spcPts val="900"/>
-              </a:spcAft>
-            </a:pPr>
-            <a:r>
-              <a:rPr sz="1500" b="1">
+                <a:spcPts val="800"/>
+              </a:spcAft>
+            </a:pPr>
+            <a:r>
+              <a:rPr sz="1400" b="1">
                 <a:solidFill>
                   <a:srgbClr val="F3C6CF"/>
                 </a:solidFill>
@@ -37172,7 +39596,7 @@
               <a:t>05   </a:t>
             </a:r>
             <a:r>
-              <a:rPr sz="1500" b="0">
+              <a:rPr sz="1400" b="0">
                 <a:solidFill>
                   <a:srgbClr val="FFFFFF"/>
                 </a:solidFill>
@@ -44571,20 +46995,112 @@
       </p:sp>
       <p:sp>
         <p:nvSpPr>
-          <p:cNvPr id="3" name="Oval 2"/>
+          <p:cNvPr id="3" name="TextBox 2"/>
+          <p:cNvSpPr txBox="1"/>
+          <p:nvPr/>
+        </p:nvSpPr>
+        <p:spPr>
+          <a:xfrm>
+            <a:off x="5244870" y="137160"/>
+            <a:ext cx="6169584" cy="2514600"/>
+          </a:xfrm>
+          <a:prstGeom prst="rect">
+            <a:avLst/>
+          </a:prstGeom>
+          <a:noFill/>
+        </p:spPr>
+        <p:txBody>
+          <a:bodyPr wrap="square" lIns="0" rIns="0" tIns="0" bIns="0" anchor="t">
+            <a:spAutoFit/>
+          </a:bodyPr>
+          <a:lstStyle/>
+          <a:p>
+            <a:pPr algn="r">
+              <a:lnSpc>
+                <a:spcPct val="100000"/>
+              </a:lnSpc>
+              <a:spcBef>
+                <a:spcPts val="0"/>
+              </a:spcBef>
+              <a:spcAft>
+                <a:spcPts val="0"/>
+              </a:spcAft>
+            </a:pPr>
+            <a:r>
+              <a:rPr sz="16500" b="1" i="0">
+                <a:solidFill>
+                  <a:srgbClr val="FFFFFF">
+                    <a:alpha val="13000"/>
+                  </a:srgbClr>
+                </a:solidFill>
+                <a:latin typeface="Calibri"/>
+              </a:rPr>
+              <a:t>10</a:t>
+            </a:r>
+          </a:p>
+        </p:txBody>
+      </p:sp>
+      <p:sp>
+        <p:nvSpPr>
+          <p:cNvPr id="4" name="TextBox 3"/>
+          <p:cNvSpPr txBox="1"/>
+          <p:nvPr/>
+        </p:nvSpPr>
+        <p:spPr>
+          <a:xfrm>
+            <a:off x="868680" y="2743200"/>
+            <a:ext cx="5318607" cy="274320"/>
+          </a:xfrm>
+          <a:prstGeom prst="rect">
+            <a:avLst/>
+          </a:prstGeom>
+          <a:noFill/>
+        </p:spPr>
+        <p:txBody>
+          <a:bodyPr wrap="square" lIns="0" rIns="0" tIns="0" bIns="0" anchor="t">
+            <a:spAutoFit/>
+          </a:bodyPr>
+          <a:lstStyle/>
+          <a:p>
+            <a:pPr algn="l">
+              <a:lnSpc>
+                <a:spcPct val="120000"/>
+              </a:lnSpc>
+              <a:spcBef>
+                <a:spcPts val="0"/>
+              </a:spcBef>
+              <a:spcAft>
+                <a:spcPts val="0"/>
+              </a:spcAft>
+            </a:pPr>
+            <a:r>
+              <a:rPr sz="1200" b="1" i="0">
+                <a:solidFill>
+                  <a:srgbClr val="F3C6CF"/>
+                </a:solidFill>
+                <a:latin typeface="Calibri"/>
+              </a:rPr>
+              <a:t>SECTION 10</a:t>
+            </a:r>
+          </a:p>
+        </p:txBody>
+      </p:sp>
+      <p:sp>
+        <p:nvSpPr>
+          <p:cNvPr id="5" name="Rectangle 4"/>
           <p:cNvSpPr/>
           <p:nvPr/>
         </p:nvSpPr>
         <p:spPr>
           <a:xfrm>
-            <a:off x="868680" y="1051560"/>
-            <a:ext cx="1325880" cy="1325880"/>
-          </a:xfrm>
-          <a:prstGeom prst="ellipse">
+            <a:off x="868680" y="3127248"/>
+            <a:ext cx="289560" cy="54864"/>
+          </a:xfrm>
+          <a:prstGeom prst="rect">
             <a:avLst/>
           </a:prstGeom>
           <a:solidFill>
-            <a:srgbClr val="A51C30"/>
+            <a:srgbClr val="00B3A4"/>
           </a:solidFill>
           <a:ln>
             <a:noFill/>
@@ -44606,31 +47122,242 @@
           </a:fontRef>
         </p:style>
         <p:txBody>
-          <a:bodyPr rtlCol="0" anchor="ctr" lIns="0" rIns="0" tIns="0" bIns="0"/>
+          <a:bodyPr rtlCol="0" anchor="ctr"/>
           <a:lstStyle/>
           <a:p>
             <a:pPr algn="ctr"/>
-            <a:r>
-              <a:rPr sz="4800" b="1">
-                <a:solidFill>
-                  <a:srgbClr val="FFFFFF"/>
-                </a:solidFill>
-                <a:latin typeface="Calibri"/>
-              </a:rPr>
-              <a:t>10</a:t>
-            </a:r>
-          </a:p>
-        </p:txBody>
-      </p:sp>
-      <p:sp>
-        <p:nvSpPr>
-          <p:cNvPr id="4" name="TextBox 3"/>
+          </a:p>
+        </p:txBody>
+      </p:sp>
+      <p:sp>
+        <p:nvSpPr>
+          <p:cNvPr id="6" name="Rectangle 5"/>
+          <p:cNvSpPr/>
+          <p:nvPr/>
+        </p:nvSpPr>
+        <p:spPr>
+          <a:xfrm>
+            <a:off x="1158240" y="3127248"/>
+            <a:ext cx="289560" cy="54864"/>
+          </a:xfrm>
+          <a:prstGeom prst="rect">
+            <a:avLst/>
+          </a:prstGeom>
+          <a:solidFill>
+            <a:srgbClr val="2FB673"/>
+          </a:solidFill>
+          <a:ln>
+            <a:noFill/>
+          </a:ln>
+          <a:effectLst/>
+        </p:spPr>
+        <p:style>
+          <a:lnRef idx="1">
+            <a:schemeClr val="accent1"/>
+          </a:lnRef>
+          <a:fillRef idx="3">
+            <a:schemeClr val="accent1"/>
+          </a:fillRef>
+          <a:effectRef idx="2">
+            <a:schemeClr val="accent1"/>
+          </a:effectRef>
+          <a:fontRef idx="minor">
+            <a:schemeClr val="lt1"/>
+          </a:fontRef>
+        </p:style>
+        <p:txBody>
+          <a:bodyPr rtlCol="0" anchor="ctr"/>
+          <a:lstStyle/>
+          <a:p>
+            <a:pPr algn="ctr"/>
+          </a:p>
+        </p:txBody>
+      </p:sp>
+      <p:sp>
+        <p:nvSpPr>
+          <p:cNvPr id="7" name="Rectangle 6"/>
+          <p:cNvSpPr/>
+          <p:nvPr/>
+        </p:nvSpPr>
+        <p:spPr>
+          <a:xfrm>
+            <a:off x="1447800" y="3127248"/>
+            <a:ext cx="289560" cy="54864"/>
+          </a:xfrm>
+          <a:prstGeom prst="rect">
+            <a:avLst/>
+          </a:prstGeom>
+          <a:solidFill>
+            <a:srgbClr val="8CBF3F"/>
+          </a:solidFill>
+          <a:ln>
+            <a:noFill/>
+          </a:ln>
+          <a:effectLst/>
+        </p:spPr>
+        <p:style>
+          <a:lnRef idx="1">
+            <a:schemeClr val="accent1"/>
+          </a:lnRef>
+          <a:fillRef idx="3">
+            <a:schemeClr val="accent1"/>
+          </a:fillRef>
+          <a:effectRef idx="2">
+            <a:schemeClr val="accent1"/>
+          </a:effectRef>
+          <a:fontRef idx="minor">
+            <a:schemeClr val="lt1"/>
+          </a:fontRef>
+        </p:style>
+        <p:txBody>
+          <a:bodyPr rtlCol="0" anchor="ctr"/>
+          <a:lstStyle/>
+          <a:p>
+            <a:pPr algn="ctr"/>
+          </a:p>
+        </p:txBody>
+      </p:sp>
+      <p:sp>
+        <p:nvSpPr>
+          <p:cNvPr id="8" name="Rectangle 7"/>
+          <p:cNvSpPr/>
+          <p:nvPr/>
+        </p:nvSpPr>
+        <p:spPr>
+          <a:xfrm>
+            <a:off x="1737360" y="3127248"/>
+            <a:ext cx="289560" cy="54864"/>
+          </a:xfrm>
+          <a:prstGeom prst="rect">
+            <a:avLst/>
+          </a:prstGeom>
+          <a:solidFill>
+            <a:srgbClr val="E8B33A"/>
+          </a:solidFill>
+          <a:ln>
+            <a:noFill/>
+          </a:ln>
+          <a:effectLst/>
+        </p:spPr>
+        <p:style>
+          <a:lnRef idx="1">
+            <a:schemeClr val="accent1"/>
+          </a:lnRef>
+          <a:fillRef idx="3">
+            <a:schemeClr val="accent1"/>
+          </a:fillRef>
+          <a:effectRef idx="2">
+            <a:schemeClr val="accent1"/>
+          </a:effectRef>
+          <a:fontRef idx="minor">
+            <a:schemeClr val="lt1"/>
+          </a:fontRef>
+        </p:style>
+        <p:txBody>
+          <a:bodyPr rtlCol="0" anchor="ctr"/>
+          <a:lstStyle/>
+          <a:p>
+            <a:pPr algn="ctr"/>
+          </a:p>
+        </p:txBody>
+      </p:sp>
+      <p:sp>
+        <p:nvSpPr>
+          <p:cNvPr id="9" name="Rectangle 8"/>
+          <p:cNvSpPr/>
+          <p:nvPr/>
+        </p:nvSpPr>
+        <p:spPr>
+          <a:xfrm>
+            <a:off x="2026920" y="3127248"/>
+            <a:ext cx="289560" cy="54864"/>
+          </a:xfrm>
+          <a:prstGeom prst="rect">
+            <a:avLst/>
+          </a:prstGeom>
+          <a:solidFill>
+            <a:srgbClr val="E8823A"/>
+          </a:solidFill>
+          <a:ln>
+            <a:noFill/>
+          </a:ln>
+          <a:effectLst/>
+        </p:spPr>
+        <p:style>
+          <a:lnRef idx="1">
+            <a:schemeClr val="accent1"/>
+          </a:lnRef>
+          <a:fillRef idx="3">
+            <a:schemeClr val="accent1"/>
+          </a:fillRef>
+          <a:effectRef idx="2">
+            <a:schemeClr val="accent1"/>
+          </a:effectRef>
+          <a:fontRef idx="minor">
+            <a:schemeClr val="lt1"/>
+          </a:fontRef>
+        </p:style>
+        <p:txBody>
+          <a:bodyPr rtlCol="0" anchor="ctr"/>
+          <a:lstStyle/>
+          <a:p>
+            <a:pPr algn="ctr"/>
+          </a:p>
+        </p:txBody>
+      </p:sp>
+      <p:sp>
+        <p:nvSpPr>
+          <p:cNvPr id="10" name="Rectangle 9"/>
+          <p:cNvSpPr/>
+          <p:nvPr/>
+        </p:nvSpPr>
+        <p:spPr>
+          <a:xfrm>
+            <a:off x="2316480" y="3127248"/>
+            <a:ext cx="289560" cy="54864"/>
+          </a:xfrm>
+          <a:prstGeom prst="rect">
+            <a:avLst/>
+          </a:prstGeom>
+          <a:solidFill>
+            <a:srgbClr val="D9534F"/>
+          </a:solidFill>
+          <a:ln>
+            <a:noFill/>
+          </a:ln>
+          <a:effectLst/>
+        </p:spPr>
+        <p:style>
+          <a:lnRef idx="1">
+            <a:schemeClr val="accent1"/>
+          </a:lnRef>
+          <a:fillRef idx="3">
+            <a:schemeClr val="accent1"/>
+          </a:fillRef>
+          <a:effectRef idx="2">
+            <a:schemeClr val="accent1"/>
+          </a:effectRef>
+          <a:fontRef idx="minor">
+            <a:schemeClr val="lt1"/>
+          </a:fontRef>
+        </p:style>
+        <p:txBody>
+          <a:bodyPr rtlCol="0" anchor="ctr"/>
+          <a:lstStyle/>
+          <a:p>
+            <a:pPr algn="ctr"/>
+          </a:p>
+        </p:txBody>
+      </p:sp>
+      <p:sp>
+        <p:nvSpPr>
+          <p:cNvPr id="11" name="TextBox 10"/>
           <p:cNvSpPr txBox="1"/>
           <p:nvPr/>
         </p:nvSpPr>
         <p:spPr>
           <a:xfrm>
-            <a:off x="868680" y="2697480"/>
+            <a:off x="868680" y="3310128"/>
             <a:ext cx="5956840" cy="688340"/>
           </a:xfrm>
           <a:prstGeom prst="rect">
@@ -44669,14 +47396,14 @@
       </p:sp>
       <p:sp>
         <p:nvSpPr>
-          <p:cNvPr id="5" name="TextBox 4"/>
+          <p:cNvPr id="12" name="TextBox 11"/>
           <p:cNvSpPr txBox="1"/>
           <p:nvPr/>
         </p:nvSpPr>
         <p:spPr>
           <a:xfrm>
-            <a:off x="868680" y="3614420"/>
-            <a:ext cx="5956840" cy="2603499"/>
+            <a:off x="868680" y="4190491"/>
+            <a:ext cx="5956840" cy="2027428"/>
           </a:xfrm>
           <a:prstGeom prst="rect">
             <a:avLst/>
@@ -44714,13 +47441,13 @@
       </p:sp>
       <p:sp>
         <p:nvSpPr>
-          <p:cNvPr id="6" name="TextBox 5"/>
+          <p:cNvPr id="13" name="TextBox 12"/>
           <p:cNvSpPr txBox="1"/>
           <p:nvPr/>
         </p:nvSpPr>
         <p:spPr>
           <a:xfrm>
-            <a:off x="7585057" y="1097280"/>
+            <a:off x="7585057" y="2788920"/>
             <a:ext cx="3829397" cy="274320"/>
           </a:xfrm>
           <a:prstGeom prst="rect">
@@ -44759,14 +47486,14 @@
       </p:sp>
       <p:sp>
         <p:nvSpPr>
-          <p:cNvPr id="7" name="TextBox 6"/>
+          <p:cNvPr id="14" name="TextBox 13"/>
           <p:cNvSpPr txBox="1"/>
           <p:nvPr/>
         </p:nvSpPr>
         <p:spPr>
           <a:xfrm>
-            <a:off x="7585057" y="1481328"/>
-            <a:ext cx="3829397" cy="4206240"/>
+            <a:off x="7585057" y="3154680"/>
+            <a:ext cx="3829397" cy="3063239"/>
           </a:xfrm>
           <a:prstGeom prst="rect">
             <a:avLst/>
@@ -44787,11 +47514,11 @@
                 <a:spcPts val="0"/>
               </a:spcBef>
               <a:spcAft>
-                <a:spcPts val="900"/>
-              </a:spcAft>
-            </a:pPr>
-            <a:r>
-              <a:rPr sz="1500" b="1">
+                <a:spcPts val="800"/>
+              </a:spcAft>
+            </a:pPr>
+            <a:r>
+              <a:rPr sz="1400" b="1">
                 <a:solidFill>
                   <a:srgbClr val="F3C6CF"/>
                 </a:solidFill>
@@ -44800,7 +47527,7 @@
               <a:t>01   </a:t>
             </a:r>
             <a:r>
-              <a:rPr sz="1500" b="0">
+              <a:rPr sz="1400" b="0">
                 <a:solidFill>
                   <a:srgbClr val="FFFFFF"/>
                 </a:solidFill>
@@ -44818,11 +47545,11 @@
                 <a:spcPts val="0"/>
               </a:spcBef>
               <a:spcAft>
-                <a:spcPts val="900"/>
-              </a:spcAft>
-            </a:pPr>
-            <a:r>
-              <a:rPr sz="1500" b="1">
+                <a:spcPts val="800"/>
+              </a:spcAft>
+            </a:pPr>
+            <a:r>
+              <a:rPr sz="1400" b="1">
                 <a:solidFill>
                   <a:srgbClr val="F3C6CF"/>
                 </a:solidFill>
@@ -44831,7 +47558,7 @@
               <a:t>02   </a:t>
             </a:r>
             <a:r>
-              <a:rPr sz="1500" b="0">
+              <a:rPr sz="1400" b="0">
                 <a:solidFill>
                   <a:srgbClr val="FFFFFF"/>
                 </a:solidFill>
@@ -44849,11 +47576,11 @@
                 <a:spcPts val="0"/>
               </a:spcBef>
               <a:spcAft>
-                <a:spcPts val="900"/>
-              </a:spcAft>
-            </a:pPr>
-            <a:r>
-              <a:rPr sz="1500" b="1">
+                <a:spcPts val="800"/>
+              </a:spcAft>
+            </a:pPr>
+            <a:r>
+              <a:rPr sz="1400" b="1">
                 <a:solidFill>
                   <a:srgbClr val="F3C6CF"/>
                 </a:solidFill>
@@ -44862,7 +47589,7 @@
               <a:t>03   </a:t>
             </a:r>
             <a:r>
-              <a:rPr sz="1500" b="0">
+              <a:rPr sz="1400" b="0">
                 <a:solidFill>
                   <a:srgbClr val="FFFFFF"/>
                 </a:solidFill>
@@ -44880,11 +47607,11 @@
                 <a:spcPts val="0"/>
               </a:spcBef>
               <a:spcAft>
-                <a:spcPts val="900"/>
-              </a:spcAft>
-            </a:pPr>
-            <a:r>
-              <a:rPr sz="1500" b="1">
+                <a:spcPts val="800"/>
+              </a:spcAft>
+            </a:pPr>
+            <a:r>
+              <a:rPr sz="1400" b="1">
                 <a:solidFill>
                   <a:srgbClr val="F3C6CF"/>
                 </a:solidFill>
@@ -44893,7 +47620,7 @@
               <a:t>04   </a:t>
             </a:r>
             <a:r>
-              <a:rPr sz="1500" b="0">
+              <a:rPr sz="1400" b="0">
                 <a:solidFill>
                   <a:srgbClr val="FFFFFF"/>
                 </a:solidFill>
@@ -44911,11 +47638,11 @@
                 <a:spcPts val="0"/>
               </a:spcBef>
               <a:spcAft>
-                <a:spcPts val="900"/>
-              </a:spcAft>
-            </a:pPr>
-            <a:r>
-              <a:rPr sz="1500" b="1">
+                <a:spcPts val="800"/>
+              </a:spcAft>
+            </a:pPr>
+            <a:r>
+              <a:rPr sz="1400" b="1">
                 <a:solidFill>
                   <a:srgbClr val="F3C6CF"/>
                 </a:solidFill>
@@ -44924,7 +47651,7 @@
               <a:t>05   </a:t>
             </a:r>
             <a:r>
-              <a:rPr sz="1500" b="0">
+              <a:rPr sz="1400" b="0">
                 <a:solidFill>
                   <a:srgbClr val="FFFFFF"/>
                 </a:solidFill>
@@ -53138,20 +55865,112 @@
       </p:sp>
       <p:sp>
         <p:nvSpPr>
-          <p:cNvPr id="3" name="Oval 2"/>
+          <p:cNvPr id="3" name="TextBox 2"/>
+          <p:cNvSpPr txBox="1"/>
+          <p:nvPr/>
+        </p:nvSpPr>
+        <p:spPr>
+          <a:xfrm>
+            <a:off x="5244870" y="137160"/>
+            <a:ext cx="6169584" cy="2514600"/>
+          </a:xfrm>
+          <a:prstGeom prst="rect">
+            <a:avLst/>
+          </a:prstGeom>
+          <a:noFill/>
+        </p:spPr>
+        <p:txBody>
+          <a:bodyPr wrap="square" lIns="0" rIns="0" tIns="0" bIns="0" anchor="t">
+            <a:spAutoFit/>
+          </a:bodyPr>
+          <a:lstStyle/>
+          <a:p>
+            <a:pPr algn="r">
+              <a:lnSpc>
+                <a:spcPct val="100000"/>
+              </a:lnSpc>
+              <a:spcBef>
+                <a:spcPts val="0"/>
+              </a:spcBef>
+              <a:spcAft>
+                <a:spcPts val="0"/>
+              </a:spcAft>
+            </a:pPr>
+            <a:r>
+              <a:rPr sz="16500" b="1" i="0">
+                <a:solidFill>
+                  <a:srgbClr val="FFFFFF">
+                    <a:alpha val="13000"/>
+                  </a:srgbClr>
+                </a:solidFill>
+                <a:latin typeface="Calibri"/>
+              </a:rPr>
+              <a:t>01</a:t>
+            </a:r>
+          </a:p>
+        </p:txBody>
+      </p:sp>
+      <p:sp>
+        <p:nvSpPr>
+          <p:cNvPr id="4" name="TextBox 3"/>
+          <p:cNvSpPr txBox="1"/>
+          <p:nvPr/>
+        </p:nvSpPr>
+        <p:spPr>
+          <a:xfrm>
+            <a:off x="868680" y="2743200"/>
+            <a:ext cx="5318607" cy="274320"/>
+          </a:xfrm>
+          <a:prstGeom prst="rect">
+            <a:avLst/>
+          </a:prstGeom>
+          <a:noFill/>
+        </p:spPr>
+        <p:txBody>
+          <a:bodyPr wrap="square" lIns="0" rIns="0" tIns="0" bIns="0" anchor="t">
+            <a:spAutoFit/>
+          </a:bodyPr>
+          <a:lstStyle/>
+          <a:p>
+            <a:pPr algn="l">
+              <a:lnSpc>
+                <a:spcPct val="120000"/>
+              </a:lnSpc>
+              <a:spcBef>
+                <a:spcPts val="0"/>
+              </a:spcBef>
+              <a:spcAft>
+                <a:spcPts val="0"/>
+              </a:spcAft>
+            </a:pPr>
+            <a:r>
+              <a:rPr sz="1200" b="1" i="0">
+                <a:solidFill>
+                  <a:srgbClr val="F3C6CF"/>
+                </a:solidFill>
+                <a:latin typeface="Calibri"/>
+              </a:rPr>
+              <a:t>SECTION 01</a:t>
+            </a:r>
+          </a:p>
+        </p:txBody>
+      </p:sp>
+      <p:sp>
+        <p:nvSpPr>
+          <p:cNvPr id="5" name="Rectangle 4"/>
           <p:cNvSpPr/>
           <p:nvPr/>
         </p:nvSpPr>
         <p:spPr>
           <a:xfrm>
-            <a:off x="868680" y="1051560"/>
-            <a:ext cx="1325880" cy="1325880"/>
-          </a:xfrm>
-          <a:prstGeom prst="ellipse">
+            <a:off x="868680" y="3127248"/>
+            <a:ext cx="289560" cy="54864"/>
+          </a:xfrm>
+          <a:prstGeom prst="rect">
             <a:avLst/>
           </a:prstGeom>
           <a:solidFill>
-            <a:srgbClr val="A51C30"/>
+            <a:srgbClr val="00B3A4"/>
           </a:solidFill>
           <a:ln>
             <a:noFill/>
@@ -53173,31 +55992,242 @@
           </a:fontRef>
         </p:style>
         <p:txBody>
-          <a:bodyPr rtlCol="0" anchor="ctr" lIns="0" rIns="0" tIns="0" bIns="0"/>
+          <a:bodyPr rtlCol="0" anchor="ctr"/>
           <a:lstStyle/>
           <a:p>
             <a:pPr algn="ctr"/>
-            <a:r>
-              <a:rPr sz="4800" b="1">
-                <a:solidFill>
-                  <a:srgbClr val="FFFFFF"/>
-                </a:solidFill>
-                <a:latin typeface="Calibri"/>
-              </a:rPr>
-              <a:t>1</a:t>
-            </a:r>
-          </a:p>
-        </p:txBody>
-      </p:sp>
-      <p:sp>
-        <p:nvSpPr>
-          <p:cNvPr id="4" name="TextBox 3"/>
+          </a:p>
+        </p:txBody>
+      </p:sp>
+      <p:sp>
+        <p:nvSpPr>
+          <p:cNvPr id="6" name="Rectangle 5"/>
+          <p:cNvSpPr/>
+          <p:nvPr/>
+        </p:nvSpPr>
+        <p:spPr>
+          <a:xfrm>
+            <a:off x="1158240" y="3127248"/>
+            <a:ext cx="289560" cy="54864"/>
+          </a:xfrm>
+          <a:prstGeom prst="rect">
+            <a:avLst/>
+          </a:prstGeom>
+          <a:solidFill>
+            <a:srgbClr val="2FB673"/>
+          </a:solidFill>
+          <a:ln>
+            <a:noFill/>
+          </a:ln>
+          <a:effectLst/>
+        </p:spPr>
+        <p:style>
+          <a:lnRef idx="1">
+            <a:schemeClr val="accent1"/>
+          </a:lnRef>
+          <a:fillRef idx="3">
+            <a:schemeClr val="accent1"/>
+          </a:fillRef>
+          <a:effectRef idx="2">
+            <a:schemeClr val="accent1"/>
+          </a:effectRef>
+          <a:fontRef idx="minor">
+            <a:schemeClr val="lt1"/>
+          </a:fontRef>
+        </p:style>
+        <p:txBody>
+          <a:bodyPr rtlCol="0" anchor="ctr"/>
+          <a:lstStyle/>
+          <a:p>
+            <a:pPr algn="ctr"/>
+          </a:p>
+        </p:txBody>
+      </p:sp>
+      <p:sp>
+        <p:nvSpPr>
+          <p:cNvPr id="7" name="Rectangle 6"/>
+          <p:cNvSpPr/>
+          <p:nvPr/>
+        </p:nvSpPr>
+        <p:spPr>
+          <a:xfrm>
+            <a:off x="1447800" y="3127248"/>
+            <a:ext cx="289560" cy="54864"/>
+          </a:xfrm>
+          <a:prstGeom prst="rect">
+            <a:avLst/>
+          </a:prstGeom>
+          <a:solidFill>
+            <a:srgbClr val="8CBF3F"/>
+          </a:solidFill>
+          <a:ln>
+            <a:noFill/>
+          </a:ln>
+          <a:effectLst/>
+        </p:spPr>
+        <p:style>
+          <a:lnRef idx="1">
+            <a:schemeClr val="accent1"/>
+          </a:lnRef>
+          <a:fillRef idx="3">
+            <a:schemeClr val="accent1"/>
+          </a:fillRef>
+          <a:effectRef idx="2">
+            <a:schemeClr val="accent1"/>
+          </a:effectRef>
+          <a:fontRef idx="minor">
+            <a:schemeClr val="lt1"/>
+          </a:fontRef>
+        </p:style>
+        <p:txBody>
+          <a:bodyPr rtlCol="0" anchor="ctr"/>
+          <a:lstStyle/>
+          <a:p>
+            <a:pPr algn="ctr"/>
+          </a:p>
+        </p:txBody>
+      </p:sp>
+      <p:sp>
+        <p:nvSpPr>
+          <p:cNvPr id="8" name="Rectangle 7"/>
+          <p:cNvSpPr/>
+          <p:nvPr/>
+        </p:nvSpPr>
+        <p:spPr>
+          <a:xfrm>
+            <a:off x="1737360" y="3127248"/>
+            <a:ext cx="289560" cy="54864"/>
+          </a:xfrm>
+          <a:prstGeom prst="rect">
+            <a:avLst/>
+          </a:prstGeom>
+          <a:solidFill>
+            <a:srgbClr val="E8B33A"/>
+          </a:solidFill>
+          <a:ln>
+            <a:noFill/>
+          </a:ln>
+          <a:effectLst/>
+        </p:spPr>
+        <p:style>
+          <a:lnRef idx="1">
+            <a:schemeClr val="accent1"/>
+          </a:lnRef>
+          <a:fillRef idx="3">
+            <a:schemeClr val="accent1"/>
+          </a:fillRef>
+          <a:effectRef idx="2">
+            <a:schemeClr val="accent1"/>
+          </a:effectRef>
+          <a:fontRef idx="minor">
+            <a:schemeClr val="lt1"/>
+          </a:fontRef>
+        </p:style>
+        <p:txBody>
+          <a:bodyPr rtlCol="0" anchor="ctr"/>
+          <a:lstStyle/>
+          <a:p>
+            <a:pPr algn="ctr"/>
+          </a:p>
+        </p:txBody>
+      </p:sp>
+      <p:sp>
+        <p:nvSpPr>
+          <p:cNvPr id="9" name="Rectangle 8"/>
+          <p:cNvSpPr/>
+          <p:nvPr/>
+        </p:nvSpPr>
+        <p:spPr>
+          <a:xfrm>
+            <a:off x="2026920" y="3127248"/>
+            <a:ext cx="289560" cy="54864"/>
+          </a:xfrm>
+          <a:prstGeom prst="rect">
+            <a:avLst/>
+          </a:prstGeom>
+          <a:solidFill>
+            <a:srgbClr val="E8823A"/>
+          </a:solidFill>
+          <a:ln>
+            <a:noFill/>
+          </a:ln>
+          <a:effectLst/>
+        </p:spPr>
+        <p:style>
+          <a:lnRef idx="1">
+            <a:schemeClr val="accent1"/>
+          </a:lnRef>
+          <a:fillRef idx="3">
+            <a:schemeClr val="accent1"/>
+          </a:fillRef>
+          <a:effectRef idx="2">
+            <a:schemeClr val="accent1"/>
+          </a:effectRef>
+          <a:fontRef idx="minor">
+            <a:schemeClr val="lt1"/>
+          </a:fontRef>
+        </p:style>
+        <p:txBody>
+          <a:bodyPr rtlCol="0" anchor="ctr"/>
+          <a:lstStyle/>
+          <a:p>
+            <a:pPr algn="ctr"/>
+          </a:p>
+        </p:txBody>
+      </p:sp>
+      <p:sp>
+        <p:nvSpPr>
+          <p:cNvPr id="10" name="Rectangle 9"/>
+          <p:cNvSpPr/>
+          <p:nvPr/>
+        </p:nvSpPr>
+        <p:spPr>
+          <a:xfrm>
+            <a:off x="2316480" y="3127248"/>
+            <a:ext cx="289560" cy="54864"/>
+          </a:xfrm>
+          <a:prstGeom prst="rect">
+            <a:avLst/>
+          </a:prstGeom>
+          <a:solidFill>
+            <a:srgbClr val="D9534F"/>
+          </a:solidFill>
+          <a:ln>
+            <a:noFill/>
+          </a:ln>
+          <a:effectLst/>
+        </p:spPr>
+        <p:style>
+          <a:lnRef idx="1">
+            <a:schemeClr val="accent1"/>
+          </a:lnRef>
+          <a:fillRef idx="3">
+            <a:schemeClr val="accent1"/>
+          </a:fillRef>
+          <a:effectRef idx="2">
+            <a:schemeClr val="accent1"/>
+          </a:effectRef>
+          <a:fontRef idx="minor">
+            <a:schemeClr val="lt1"/>
+          </a:fontRef>
+        </p:style>
+        <p:txBody>
+          <a:bodyPr rtlCol="0" anchor="ctr"/>
+          <a:lstStyle/>
+          <a:p>
+            <a:pPr algn="ctr"/>
+          </a:p>
+        </p:txBody>
+      </p:sp>
+      <p:sp>
+        <p:nvSpPr>
+          <p:cNvPr id="11" name="TextBox 10"/>
           <p:cNvSpPr txBox="1"/>
           <p:nvPr/>
         </p:nvSpPr>
         <p:spPr>
           <a:xfrm>
-            <a:off x="868680" y="2697480"/>
+            <a:off x="868680" y="3310128"/>
             <a:ext cx="5956840" cy="688340"/>
           </a:xfrm>
           <a:prstGeom prst="rect">
@@ -53236,14 +56266,14 @@
       </p:sp>
       <p:sp>
         <p:nvSpPr>
-          <p:cNvPr id="5" name="TextBox 4"/>
+          <p:cNvPr id="12" name="TextBox 11"/>
           <p:cNvSpPr txBox="1"/>
           <p:nvPr/>
         </p:nvSpPr>
         <p:spPr>
           <a:xfrm>
-            <a:off x="868680" y="3614420"/>
-            <a:ext cx="5956840" cy="2603499"/>
+            <a:off x="868680" y="4190491"/>
+            <a:ext cx="5956840" cy="2027428"/>
           </a:xfrm>
           <a:prstGeom prst="rect">
             <a:avLst/>
@@ -53281,13 +56311,13 @@
       </p:sp>
       <p:sp>
         <p:nvSpPr>
-          <p:cNvPr id="6" name="TextBox 5"/>
+          <p:cNvPr id="13" name="TextBox 12"/>
           <p:cNvSpPr txBox="1"/>
           <p:nvPr/>
         </p:nvSpPr>
         <p:spPr>
           <a:xfrm>
-            <a:off x="7585057" y="1097280"/>
+            <a:off x="7585057" y="2788920"/>
             <a:ext cx="3829397" cy="274320"/>
           </a:xfrm>
           <a:prstGeom prst="rect">
@@ -53326,14 +56356,14 @@
       </p:sp>
       <p:sp>
         <p:nvSpPr>
-          <p:cNvPr id="7" name="TextBox 6"/>
+          <p:cNvPr id="14" name="TextBox 13"/>
           <p:cNvSpPr txBox="1"/>
           <p:nvPr/>
         </p:nvSpPr>
         <p:spPr>
           <a:xfrm>
-            <a:off x="7585057" y="1481328"/>
-            <a:ext cx="3829397" cy="4206240"/>
+            <a:off x="7585057" y="3154680"/>
+            <a:ext cx="3829397" cy="3063239"/>
           </a:xfrm>
           <a:prstGeom prst="rect">
             <a:avLst/>
@@ -53354,11 +56384,11 @@
                 <a:spcPts val="0"/>
               </a:spcBef>
               <a:spcAft>
-                <a:spcPts val="900"/>
-              </a:spcAft>
-            </a:pPr>
-            <a:r>
-              <a:rPr sz="1500" b="1">
+                <a:spcPts val="800"/>
+              </a:spcAft>
+            </a:pPr>
+            <a:r>
+              <a:rPr sz="1400" b="1">
                 <a:solidFill>
                   <a:srgbClr val="F3C6CF"/>
                 </a:solidFill>
@@ -53367,7 +56397,7 @@
               <a:t>01   </a:t>
             </a:r>
             <a:r>
-              <a:rPr sz="1500" b="0">
+              <a:rPr sz="1400" b="0">
                 <a:solidFill>
                   <a:srgbClr val="FFFFFF"/>
                 </a:solidFill>
@@ -53385,11 +56415,11 @@
                 <a:spcPts val="0"/>
               </a:spcBef>
               <a:spcAft>
-                <a:spcPts val="900"/>
-              </a:spcAft>
-            </a:pPr>
-            <a:r>
-              <a:rPr sz="1500" b="1">
+                <a:spcPts val="800"/>
+              </a:spcAft>
+            </a:pPr>
+            <a:r>
+              <a:rPr sz="1400" b="1">
                 <a:solidFill>
                   <a:srgbClr val="F3C6CF"/>
                 </a:solidFill>
@@ -53398,7 +56428,7 @@
               <a:t>02   </a:t>
             </a:r>
             <a:r>
-              <a:rPr sz="1500" b="0">
+              <a:rPr sz="1400" b="0">
                 <a:solidFill>
                   <a:srgbClr val="FFFFFF"/>
                 </a:solidFill>
@@ -53416,11 +56446,11 @@
                 <a:spcPts val="0"/>
               </a:spcBef>
               <a:spcAft>
-                <a:spcPts val="900"/>
-              </a:spcAft>
-            </a:pPr>
-            <a:r>
-              <a:rPr sz="1500" b="1">
+                <a:spcPts val="800"/>
+              </a:spcAft>
+            </a:pPr>
+            <a:r>
+              <a:rPr sz="1400" b="1">
                 <a:solidFill>
                   <a:srgbClr val="F3C6CF"/>
                 </a:solidFill>
@@ -53429,7 +56459,7 @@
               <a:t>03   </a:t>
             </a:r>
             <a:r>
-              <a:rPr sz="1500" b="0">
+              <a:rPr sz="1400" b="0">
                 <a:solidFill>
                   <a:srgbClr val="FFFFFF"/>
                 </a:solidFill>
@@ -53447,11 +56477,11 @@
                 <a:spcPts val="0"/>
               </a:spcBef>
               <a:spcAft>
-                <a:spcPts val="900"/>
-              </a:spcAft>
-            </a:pPr>
-            <a:r>
-              <a:rPr sz="1500" b="1">
+                <a:spcPts val="800"/>
+              </a:spcAft>
+            </a:pPr>
+            <a:r>
+              <a:rPr sz="1400" b="1">
                 <a:solidFill>
                   <a:srgbClr val="F3C6CF"/>
                 </a:solidFill>
@@ -53460,7 +56490,7 @@
               <a:t>04   </a:t>
             </a:r>
             <a:r>
-              <a:rPr sz="1500" b="0">
+              <a:rPr sz="1400" b="0">
                 <a:solidFill>
                   <a:srgbClr val="FFFFFF"/>
                 </a:solidFill>
